--- a/updates.pptx
+++ b/updates.pptx
@@ -5,11 +5,14 @@
     <p:sldMasterId id="2147483708" r:id="rId1"/>
   </p:sldMasterIdLst>
   <p:notesMasterIdLst>
-    <p:notesMasterId r:id="rId4"/>
+    <p:notesMasterId r:id="rId7"/>
   </p:notesMasterIdLst>
   <p:sldIdLst>
     <p:sldId id="263" r:id="rId2"/>
     <p:sldId id="264" r:id="rId3"/>
+    <p:sldId id="265" r:id="rId4"/>
+    <p:sldId id="266" r:id="rId5"/>
+    <p:sldId id="267" r:id="rId6"/>
   </p:sldIdLst>
   <p:sldSz cx="12192000" cy="6858000"/>
   <p:notesSz cx="6858000" cy="9144000"/>
@@ -216,7 +219,7 @@
           <a:p>
             <a:fld id="{AB81B2D2-06A2-4596-9391-656CA05E965F}" type="datetimeFigureOut">
               <a:rPr lang="et-EE" smtClean="0"/>
-              <a:t>07.08.2026</a:t>
+              <a:t>13.08.2026</a:t>
             </a:fld>
             <a:endParaRPr lang="et-EE"/>
           </a:p>
@@ -630,7 +633,7 @@
           <a:p>
             <a:fld id="{0E412FDE-1CFE-48F6-820F-9C443C301228}" type="datetime1">
               <a:rPr lang="et-EE" smtClean="0"/>
-              <a:t>07.08.2026</a:t>
+              <a:t>13.08.2026</a:t>
             </a:fld>
             <a:endParaRPr lang="et-EE" dirty="0"/>
           </a:p>
@@ -814,7 +817,7 @@
           <a:p>
             <a:fld id="{B64C0CFC-214E-42F4-8B82-CC6D451BD70F}" type="datetime1">
               <a:rPr lang="et-EE" smtClean="0"/>
-              <a:t>07.08.2026</a:t>
+              <a:t>13.08.2026</a:t>
             </a:fld>
             <a:endParaRPr lang="et-EE"/>
           </a:p>
@@ -997,7 +1000,7 @@
           <a:p>
             <a:fld id="{5AB58BF1-41C1-47B8-ACAE-F9884B88C63A}" type="datetime1">
               <a:rPr lang="et-EE" smtClean="0"/>
-              <a:t>07.08.2026</a:t>
+              <a:t>13.08.2026</a:t>
             </a:fld>
             <a:endParaRPr lang="et-EE"/>
           </a:p>
@@ -1259,7 +1262,7 @@
           <a:p>
             <a:fld id="{E1CF8E31-244F-4A6A-A7D5-704B96C48AAE}" type="datetime1">
               <a:rPr lang="et-EE" smtClean="0"/>
-              <a:t>07.08.2026</a:t>
+              <a:t>13.08.2026</a:t>
             </a:fld>
             <a:endParaRPr lang="et-EE" dirty="0"/>
           </a:p>
@@ -1971,7 +1974,7 @@
           <a:p>
             <a:fld id="{CF92296B-3A94-4787-AA7D-8DC0AEE88FD4}" type="datetime1">
               <a:rPr lang="et-EE" smtClean="0"/>
-              <a:t>07.08.2026</a:t>
+              <a:t>13.08.2026</a:t>
             </a:fld>
             <a:endParaRPr lang="et-EE"/>
           </a:p>
@@ -2341,7 +2344,7 @@
           <a:p>
             <a:fld id="{185751C1-87AF-4EAC-9696-BB82432B7753}" type="datetime1">
               <a:rPr lang="et-EE" smtClean="0"/>
-              <a:t>07.08.2026</a:t>
+              <a:t>13.08.2026</a:t>
             </a:fld>
             <a:endParaRPr lang="et-EE"/>
           </a:p>
@@ -2439,7 +2442,7 @@
           <a:p>
             <a:fld id="{E493E3B0-4572-4FE0-8E55-6746BFAADA96}" type="datetime1">
               <a:rPr lang="et-EE" smtClean="0"/>
-              <a:t>07.08.2026</a:t>
+              <a:t>13.08.2026</a:t>
             </a:fld>
             <a:endParaRPr lang="et-EE"/>
           </a:p>
@@ -2584,7 +2587,7 @@
           <a:p>
             <a:fld id="{EE4C4D14-98D7-455C-9D0D-2863E0C0AA0D}" type="datetime1">
               <a:rPr lang="et-EE" smtClean="0"/>
-              <a:t>07.08.2026</a:t>
+              <a:t>13.08.2026</a:t>
             </a:fld>
             <a:endParaRPr lang="et-EE"/>
           </a:p>
@@ -2864,7 +2867,7 @@
           <a:p>
             <a:fld id="{94997DBE-8AE5-4A6F-9E25-F62C693D8ED5}" type="datetime1">
               <a:rPr lang="et-EE" smtClean="0"/>
-              <a:t>07.08.2026</a:t>
+              <a:t>13.08.2026</a:t>
             </a:fld>
             <a:endParaRPr lang="et-EE"/>
           </a:p>
@@ -3124,7 +3127,7 @@
           <a:p>
             <a:fld id="{DA3B51F9-97BE-4EFF-9934-D6DB8E40FF5E}" type="datetime1">
               <a:rPr lang="et-EE" smtClean="0"/>
-              <a:t>07.08.2026</a:t>
+              <a:t>13.08.2026</a:t>
             </a:fld>
             <a:endParaRPr lang="et-EE"/>
           </a:p>
@@ -3341,7 +3344,7 @@
           <a:p>
             <a:fld id="{E7C7EEDD-722C-4F14-9239-A37AD281B51F}" type="datetime1">
               <a:rPr lang="et-EE" smtClean="0"/>
-              <a:t>07.08.2026</a:t>
+              <a:t>13.08.2026</a:t>
             </a:fld>
             <a:endParaRPr lang="et-EE" dirty="0"/>
           </a:p>
@@ -4080,7 +4083,7 @@
           <a:p>
             <a:fld id="{E1CF8E31-244F-4A6A-A7D5-704B96C48AAE}" type="datetime1">
               <a:rPr lang="et-EE" smtClean="0"/>
-              <a:t>07.08.2026</a:t>
+              <a:t>13.08.2026</a:t>
             </a:fld>
             <a:endParaRPr lang="et-EE" dirty="0"/>
           </a:p>
@@ -4362,6 +4365,760 @@
     <p:extLst>
       <p:ext uri="{BB962C8B-B14F-4D97-AF65-F5344CB8AC3E}">
         <p14:creationId xmlns:p14="http://schemas.microsoft.com/office/powerpoint/2010/main" val="2655669854"/>
+      </p:ext>
+    </p:extLst>
+  </p:cSld>
+  <p:clrMapOvr>
+    <a:masterClrMapping/>
+  </p:clrMapOvr>
+</p:sld>
+</file>
+
+<file path=ppt/slides/slide3.xml><?xml version="1.0" encoding="utf-8"?>
+<p:sld xmlns:a="http://schemas.openxmlformats.org/drawingml/2006/main" xmlns:r="http://schemas.openxmlformats.org/officeDocument/2006/relationships" xmlns:p="http://schemas.openxmlformats.org/presentationml/2006/main">
+  <p:cSld>
+    <p:spTree>
+      <p:nvGrpSpPr>
+        <p:cNvPr id="1" name=""/>
+        <p:cNvGrpSpPr/>
+        <p:nvPr/>
+      </p:nvGrpSpPr>
+      <p:grpSpPr>
+        <a:xfrm>
+          <a:off x="0" y="0"/>
+          <a:ext cx="0" cy="0"/>
+          <a:chOff x="0" y="0"/>
+          <a:chExt cx="0" cy="0"/>
+        </a:xfrm>
+      </p:grpSpPr>
+      <p:pic>
+        <p:nvPicPr>
+          <p:cNvPr id="17" name="Picture 16">
+            <a:extLst>
+              <a:ext uri="{FF2B5EF4-FFF2-40B4-BE49-F238E27FC236}">
+                <a16:creationId xmlns:a16="http://schemas.microsoft.com/office/drawing/2014/main" id="{FB33E41C-9BB2-41BC-AE5F-E09004407465}"/>
+              </a:ext>
+            </a:extLst>
+          </p:cNvPr>
+          <p:cNvPicPr>
+            <a:picLocks noChangeAspect="1"/>
+          </p:cNvPicPr>
+          <p:nvPr/>
+        </p:nvPicPr>
+        <p:blipFill>
+          <a:blip r:embed="rId2"/>
+          <a:stretch>
+            <a:fillRect/>
+          </a:stretch>
+        </p:blipFill>
+        <p:spPr>
+          <a:xfrm>
+            <a:off x="4822868" y="2453767"/>
+            <a:ext cx="6661063" cy="4163164"/>
+          </a:xfrm>
+          <a:prstGeom prst="rect">
+            <a:avLst/>
+          </a:prstGeom>
+        </p:spPr>
+      </p:pic>
+      <p:sp>
+        <p:nvSpPr>
+          <p:cNvPr id="2" name="Title 1">
+            <a:extLst>
+              <a:ext uri="{FF2B5EF4-FFF2-40B4-BE49-F238E27FC236}">
+                <a16:creationId xmlns:a16="http://schemas.microsoft.com/office/drawing/2014/main" id="{6BF31FA5-6520-4CA9-9331-30A269AA64D0}"/>
+              </a:ext>
+            </a:extLst>
+          </p:cNvPr>
+          <p:cNvSpPr>
+            <a:spLocks noGrp="1"/>
+          </p:cNvSpPr>
+          <p:nvPr>
+            <p:ph type="title"/>
+          </p:nvPr>
+        </p:nvSpPr>
+        <p:spPr/>
+        <p:txBody>
+          <a:bodyPr>
+            <a:normAutofit/>
+          </a:bodyPr>
+          <a:lstStyle/>
+          <a:p>
+            <a:r>
+              <a:rPr lang="en-US" dirty="0"/>
+              <a:t>Typical Baseline Measurement</a:t>
+            </a:r>
+            <a:endParaRPr lang="LID4096" dirty="0"/>
+          </a:p>
+        </p:txBody>
+      </p:sp>
+      <p:sp>
+        <p:nvSpPr>
+          <p:cNvPr id="4" name="Date Placeholder 3">
+            <a:extLst>
+              <a:ext uri="{FF2B5EF4-FFF2-40B4-BE49-F238E27FC236}">
+                <a16:creationId xmlns:a16="http://schemas.microsoft.com/office/drawing/2014/main" id="{07956381-EBAB-40C7-AF56-E1C175082244}"/>
+              </a:ext>
+            </a:extLst>
+          </p:cNvPr>
+          <p:cNvSpPr>
+            <a:spLocks noGrp="1"/>
+          </p:cNvSpPr>
+          <p:nvPr>
+            <p:ph type="dt" sz="half" idx="10"/>
+          </p:nvPr>
+        </p:nvSpPr>
+        <p:spPr/>
+        <p:txBody>
+          <a:bodyPr/>
+          <a:lstStyle/>
+          <a:p>
+            <a:fld id="{E1CF8E31-244F-4A6A-A7D5-704B96C48AAE}" type="datetime1">
+              <a:rPr lang="et-EE" smtClean="0"/>
+              <a:t>13.08.2026</a:t>
+            </a:fld>
+            <a:endParaRPr lang="et-EE" dirty="0"/>
+          </a:p>
+        </p:txBody>
+      </p:sp>
+      <p:sp>
+        <p:nvSpPr>
+          <p:cNvPr id="5" name="Footer Placeholder 4">
+            <a:extLst>
+              <a:ext uri="{FF2B5EF4-FFF2-40B4-BE49-F238E27FC236}">
+                <a16:creationId xmlns:a16="http://schemas.microsoft.com/office/drawing/2014/main" id="{33FC2B13-FDDF-49C1-87EB-E43ACEA24E33}"/>
+              </a:ext>
+            </a:extLst>
+          </p:cNvPr>
+          <p:cNvSpPr>
+            <a:spLocks noGrp="1"/>
+          </p:cNvSpPr>
+          <p:nvPr>
+            <p:ph type="ftr" sz="quarter" idx="11"/>
+          </p:nvPr>
+        </p:nvSpPr>
+        <p:spPr/>
+        <p:txBody>
+          <a:bodyPr/>
+          <a:lstStyle/>
+          <a:p>
+            <a:r>
+              <a:rPr lang="et-EE"/>
+              <a:t>Weekly</a:t>
+            </a:r>
+          </a:p>
+        </p:txBody>
+      </p:sp>
+      <p:sp>
+        <p:nvSpPr>
+          <p:cNvPr id="6" name="Slide Number Placeholder 5">
+            <a:extLst>
+              <a:ext uri="{FF2B5EF4-FFF2-40B4-BE49-F238E27FC236}">
+                <a16:creationId xmlns:a16="http://schemas.microsoft.com/office/drawing/2014/main" id="{718F28ED-94A0-4D65-83BA-30F264BA0EC6}"/>
+              </a:ext>
+            </a:extLst>
+          </p:cNvPr>
+          <p:cNvSpPr>
+            <a:spLocks noGrp="1"/>
+          </p:cNvSpPr>
+          <p:nvPr>
+            <p:ph type="sldNum" sz="quarter" idx="12"/>
+          </p:nvPr>
+        </p:nvSpPr>
+        <p:spPr/>
+        <p:txBody>
+          <a:bodyPr/>
+          <a:lstStyle/>
+          <a:p>
+            <a:fld id="{9F39E346-B1F3-4075-BD67-234EF0F10AC6}" type="slidenum">
+              <a:rPr lang="et-EE" smtClean="0"/>
+              <a:pPr/>
+              <a:t>3</a:t>
+            </a:fld>
+            <a:endParaRPr lang="et-EE" dirty="0"/>
+          </a:p>
+        </p:txBody>
+      </p:sp>
+      <p:pic>
+        <p:nvPicPr>
+          <p:cNvPr id="13" name="Content Placeholder 12">
+            <a:extLst>
+              <a:ext uri="{FF2B5EF4-FFF2-40B4-BE49-F238E27FC236}">
+                <a16:creationId xmlns:a16="http://schemas.microsoft.com/office/drawing/2014/main" id="{4EC9A051-BE6B-4C95-BC38-28DF859A0829}"/>
+              </a:ext>
+            </a:extLst>
+          </p:cNvPr>
+          <p:cNvPicPr>
+            <a:picLocks noGrp="1" noChangeAspect="1"/>
+          </p:cNvPicPr>
+          <p:nvPr>
+            <p:ph idx="1"/>
+          </p:nvPr>
+        </p:nvPicPr>
+        <p:blipFill>
+          <a:blip r:embed="rId3"/>
+          <a:stretch>
+            <a:fillRect/>
+          </a:stretch>
+        </p:blipFill>
+        <p:spPr>
+          <a:xfrm>
+            <a:off x="239445" y="1091637"/>
+            <a:ext cx="7147575" cy="2983998"/>
+          </a:xfrm>
+        </p:spPr>
+      </p:pic>
+    </p:spTree>
+    <p:extLst>
+      <p:ext uri="{BB962C8B-B14F-4D97-AF65-F5344CB8AC3E}">
+        <p14:creationId xmlns:p14="http://schemas.microsoft.com/office/powerpoint/2010/main" val="3942996813"/>
+      </p:ext>
+    </p:extLst>
+  </p:cSld>
+  <p:clrMapOvr>
+    <a:masterClrMapping/>
+  </p:clrMapOvr>
+</p:sld>
+</file>
+
+<file path=ppt/slides/slide4.xml><?xml version="1.0" encoding="utf-8"?>
+<p:sld xmlns:a="http://schemas.openxmlformats.org/drawingml/2006/main" xmlns:r="http://schemas.openxmlformats.org/officeDocument/2006/relationships" xmlns:p="http://schemas.openxmlformats.org/presentationml/2006/main">
+  <p:cSld>
+    <p:spTree>
+      <p:nvGrpSpPr>
+        <p:cNvPr id="1" name=""/>
+        <p:cNvGrpSpPr/>
+        <p:nvPr/>
+      </p:nvGrpSpPr>
+      <p:grpSpPr>
+        <a:xfrm>
+          <a:off x="0" y="0"/>
+          <a:ext cx="0" cy="0"/>
+          <a:chOff x="0" y="0"/>
+          <a:chExt cx="0" cy="0"/>
+        </a:xfrm>
+      </p:grpSpPr>
+      <p:pic>
+        <p:nvPicPr>
+          <p:cNvPr id="9" name="Picture 8">
+            <a:extLst>
+              <a:ext uri="{FF2B5EF4-FFF2-40B4-BE49-F238E27FC236}">
+                <a16:creationId xmlns:a16="http://schemas.microsoft.com/office/drawing/2014/main" id="{67451145-114B-4B73-93EE-C0E0BE52463A}"/>
+              </a:ext>
+            </a:extLst>
+          </p:cNvPr>
+          <p:cNvPicPr>
+            <a:picLocks noChangeAspect="1"/>
+          </p:cNvPicPr>
+          <p:nvPr/>
+        </p:nvPicPr>
+        <p:blipFill>
+          <a:blip r:embed="rId2"/>
+          <a:stretch>
+            <a:fillRect/>
+          </a:stretch>
+        </p:blipFill>
+        <p:spPr>
+          <a:xfrm>
+            <a:off x="623446" y="5225872"/>
+            <a:ext cx="6264070" cy="1102653"/>
+          </a:xfrm>
+          <a:prstGeom prst="rect">
+            <a:avLst/>
+          </a:prstGeom>
+        </p:spPr>
+      </p:pic>
+      <p:pic>
+        <p:nvPicPr>
+          <p:cNvPr id="11" name="Content Placeholder 7">
+            <a:extLst>
+              <a:ext uri="{FF2B5EF4-FFF2-40B4-BE49-F238E27FC236}">
+                <a16:creationId xmlns:a16="http://schemas.microsoft.com/office/drawing/2014/main" id="{2BF6F696-411A-4868-A0EA-DAD12B419499}"/>
+              </a:ext>
+            </a:extLst>
+          </p:cNvPr>
+          <p:cNvPicPr>
+            <a:picLocks noChangeAspect="1"/>
+          </p:cNvPicPr>
+          <p:nvPr/>
+        </p:nvPicPr>
+        <p:blipFill>
+          <a:blip r:embed="rId3"/>
+          <a:stretch>
+            <a:fillRect/>
+          </a:stretch>
+        </p:blipFill>
+        <p:spPr>
+          <a:xfrm>
+            <a:off x="5569216" y="1977020"/>
+            <a:ext cx="5928630" cy="3705394"/>
+          </a:xfrm>
+          <a:prstGeom prst="rect">
+            <a:avLst/>
+          </a:prstGeom>
+        </p:spPr>
+      </p:pic>
+      <p:sp>
+        <p:nvSpPr>
+          <p:cNvPr id="2" name="Title 1">
+            <a:extLst>
+              <a:ext uri="{FF2B5EF4-FFF2-40B4-BE49-F238E27FC236}">
+                <a16:creationId xmlns:a16="http://schemas.microsoft.com/office/drawing/2014/main" id="{6BF31FA5-6520-4CA9-9331-30A269AA64D0}"/>
+              </a:ext>
+            </a:extLst>
+          </p:cNvPr>
+          <p:cNvSpPr>
+            <a:spLocks noGrp="1"/>
+          </p:cNvSpPr>
+          <p:nvPr>
+            <p:ph type="title"/>
+          </p:nvPr>
+        </p:nvSpPr>
+        <p:spPr/>
+        <p:txBody>
+          <a:bodyPr>
+            <a:normAutofit/>
+          </a:bodyPr>
+          <a:lstStyle/>
+          <a:p>
+            <a:r>
+              <a:rPr lang="en-US" dirty="0"/>
+              <a:t>New Baseline Measurement</a:t>
+            </a:r>
+            <a:endParaRPr lang="LID4096" dirty="0"/>
+          </a:p>
+        </p:txBody>
+      </p:sp>
+      <p:sp>
+        <p:nvSpPr>
+          <p:cNvPr id="4" name="Date Placeholder 3">
+            <a:extLst>
+              <a:ext uri="{FF2B5EF4-FFF2-40B4-BE49-F238E27FC236}">
+                <a16:creationId xmlns:a16="http://schemas.microsoft.com/office/drawing/2014/main" id="{07956381-EBAB-40C7-AF56-E1C175082244}"/>
+              </a:ext>
+            </a:extLst>
+          </p:cNvPr>
+          <p:cNvSpPr>
+            <a:spLocks noGrp="1"/>
+          </p:cNvSpPr>
+          <p:nvPr>
+            <p:ph type="dt" sz="half" idx="10"/>
+          </p:nvPr>
+        </p:nvSpPr>
+        <p:spPr/>
+        <p:txBody>
+          <a:bodyPr/>
+          <a:lstStyle/>
+          <a:p>
+            <a:fld id="{E1CF8E31-244F-4A6A-A7D5-704B96C48AAE}" type="datetime1">
+              <a:rPr lang="et-EE" smtClean="0"/>
+              <a:t>13.08.2026</a:t>
+            </a:fld>
+            <a:endParaRPr lang="et-EE" dirty="0"/>
+          </a:p>
+        </p:txBody>
+      </p:sp>
+      <p:sp>
+        <p:nvSpPr>
+          <p:cNvPr id="5" name="Footer Placeholder 4">
+            <a:extLst>
+              <a:ext uri="{FF2B5EF4-FFF2-40B4-BE49-F238E27FC236}">
+                <a16:creationId xmlns:a16="http://schemas.microsoft.com/office/drawing/2014/main" id="{33FC2B13-FDDF-49C1-87EB-E43ACEA24E33}"/>
+              </a:ext>
+            </a:extLst>
+          </p:cNvPr>
+          <p:cNvSpPr>
+            <a:spLocks noGrp="1"/>
+          </p:cNvSpPr>
+          <p:nvPr>
+            <p:ph type="ftr" sz="quarter" idx="11"/>
+          </p:nvPr>
+        </p:nvSpPr>
+        <p:spPr/>
+        <p:txBody>
+          <a:bodyPr/>
+          <a:lstStyle/>
+          <a:p>
+            <a:r>
+              <a:rPr lang="et-EE"/>
+              <a:t>Weekly</a:t>
+            </a:r>
+          </a:p>
+        </p:txBody>
+      </p:sp>
+      <p:sp>
+        <p:nvSpPr>
+          <p:cNvPr id="6" name="Slide Number Placeholder 5">
+            <a:extLst>
+              <a:ext uri="{FF2B5EF4-FFF2-40B4-BE49-F238E27FC236}">
+                <a16:creationId xmlns:a16="http://schemas.microsoft.com/office/drawing/2014/main" id="{718F28ED-94A0-4D65-83BA-30F264BA0EC6}"/>
+              </a:ext>
+            </a:extLst>
+          </p:cNvPr>
+          <p:cNvSpPr>
+            <a:spLocks noGrp="1"/>
+          </p:cNvSpPr>
+          <p:nvPr>
+            <p:ph type="sldNum" sz="quarter" idx="12"/>
+          </p:nvPr>
+        </p:nvSpPr>
+        <p:spPr/>
+        <p:txBody>
+          <a:bodyPr/>
+          <a:lstStyle/>
+          <a:p>
+            <a:fld id="{9F39E346-B1F3-4075-BD67-234EF0F10AC6}" type="slidenum">
+              <a:rPr lang="et-EE" smtClean="0"/>
+              <a:pPr/>
+              <a:t>4</a:t>
+            </a:fld>
+            <a:endParaRPr lang="et-EE" dirty="0"/>
+          </a:p>
+        </p:txBody>
+      </p:sp>
+      <p:pic>
+        <p:nvPicPr>
+          <p:cNvPr id="13" name="Content Placeholder 12">
+            <a:extLst>
+              <a:ext uri="{FF2B5EF4-FFF2-40B4-BE49-F238E27FC236}">
+                <a16:creationId xmlns:a16="http://schemas.microsoft.com/office/drawing/2014/main" id="{4EC9A051-BE6B-4C95-BC38-28DF859A0829}"/>
+              </a:ext>
+            </a:extLst>
+          </p:cNvPr>
+          <p:cNvPicPr>
+            <a:picLocks noGrp="1" noChangeAspect="1"/>
+          </p:cNvPicPr>
+          <p:nvPr>
+            <p:ph idx="1"/>
+          </p:nvPr>
+        </p:nvPicPr>
+        <p:blipFill>
+          <a:blip r:embed="rId4"/>
+          <a:srcRect/>
+          <a:stretch/>
+        </p:blipFill>
+        <p:spPr>
+          <a:xfrm>
+            <a:off x="301848" y="845719"/>
+            <a:ext cx="7147575" cy="2983998"/>
+          </a:xfrm>
+        </p:spPr>
+      </p:pic>
+      <p:sp>
+        <p:nvSpPr>
+          <p:cNvPr id="10" name="TextBox 9">
+            <a:extLst>
+              <a:ext uri="{FF2B5EF4-FFF2-40B4-BE49-F238E27FC236}">
+                <a16:creationId xmlns:a16="http://schemas.microsoft.com/office/drawing/2014/main" id="{34CF6C30-29FB-436C-8392-65EC53DA273B}"/>
+              </a:ext>
+            </a:extLst>
+          </p:cNvPr>
+          <p:cNvSpPr txBox="1"/>
+          <p:nvPr/>
+        </p:nvSpPr>
+        <p:spPr>
+          <a:xfrm>
+            <a:off x="1095810" y="2942789"/>
+            <a:ext cx="2942790" cy="307777"/>
+          </a:xfrm>
+          <a:prstGeom prst="rect">
+            <a:avLst/>
+          </a:prstGeom>
+          <a:noFill/>
+        </p:spPr>
+        <p:txBody>
+          <a:bodyPr wrap="square" rtlCol="0">
+            <a:spAutoFit/>
+          </a:bodyPr>
+          <a:lstStyle/>
+          <a:p>
+            <a:pPr algn="l"/>
+            <a:r>
+              <a:rPr lang="en-US" sz="1400" dirty="0">
+                <a:solidFill>
+                  <a:schemeClr val="bg1"/>
+                </a:solidFill>
+                <a:highlight>
+                  <a:srgbClr val="FF00FF"/>
+                </a:highlight>
+                <a:latin typeface="Arial" panose="020B0604020202020204" pitchFamily="34" charset="0"/>
+                <a:cs typeface="Arial" panose="020B0604020202020204" pitchFamily="34" charset="0"/>
+              </a:rPr>
+              <a:t>SYS REF is limited to 300 MHz </a:t>
+            </a:r>
+            <a:endParaRPr lang="LID4096" sz="1400" dirty="0">
+              <a:solidFill>
+                <a:schemeClr val="bg1"/>
+              </a:solidFill>
+              <a:highlight>
+                <a:srgbClr val="FF00FF"/>
+              </a:highlight>
+              <a:latin typeface="Arial" panose="020B0604020202020204" pitchFamily="34" charset="0"/>
+              <a:cs typeface="Arial" panose="020B0604020202020204" pitchFamily="34" charset="0"/>
+            </a:endParaRPr>
+          </a:p>
+        </p:txBody>
+      </p:sp>
+      <p:sp>
+        <p:nvSpPr>
+          <p:cNvPr id="14" name="TextBox 13">
+            <a:extLst>
+              <a:ext uri="{FF2B5EF4-FFF2-40B4-BE49-F238E27FC236}">
+                <a16:creationId xmlns:a16="http://schemas.microsoft.com/office/drawing/2014/main" id="{A4153150-3825-4E08-BEC4-A6590B0F7E40}"/>
+              </a:ext>
+            </a:extLst>
+          </p:cNvPr>
+          <p:cNvSpPr txBox="1"/>
+          <p:nvPr/>
+        </p:nvSpPr>
+        <p:spPr>
+          <a:xfrm>
+            <a:off x="301848" y="4939145"/>
+            <a:ext cx="2942790" cy="307777"/>
+          </a:xfrm>
+          <a:prstGeom prst="rect">
+            <a:avLst/>
+          </a:prstGeom>
+          <a:noFill/>
+        </p:spPr>
+        <p:txBody>
+          <a:bodyPr wrap="square" rtlCol="0">
+            <a:spAutoFit/>
+          </a:bodyPr>
+          <a:lstStyle/>
+          <a:p>
+            <a:pPr algn="l"/>
+            <a:r>
+              <a:rPr lang="en-US" sz="1400" dirty="0">
+                <a:solidFill>
+                  <a:schemeClr val="bg1"/>
+                </a:solidFill>
+                <a:latin typeface="Arial" panose="020B0604020202020204" pitchFamily="34" charset="0"/>
+                <a:cs typeface="Arial" panose="020B0604020202020204" pitchFamily="34" charset="0"/>
+              </a:rPr>
+              <a:t>Phase noise in the PM readout:</a:t>
+            </a:r>
+            <a:endParaRPr lang="LID4096" sz="1400" dirty="0">
+              <a:solidFill>
+                <a:schemeClr val="bg1"/>
+              </a:solidFill>
+              <a:latin typeface="Arial" panose="020B0604020202020204" pitchFamily="34" charset="0"/>
+              <a:cs typeface="Arial" panose="020B0604020202020204" pitchFamily="34" charset="0"/>
+            </a:endParaRPr>
+          </a:p>
+        </p:txBody>
+      </p:sp>
+    </p:spTree>
+    <p:extLst>
+      <p:ext uri="{BB962C8B-B14F-4D97-AF65-F5344CB8AC3E}">
+        <p14:creationId xmlns:p14="http://schemas.microsoft.com/office/powerpoint/2010/main" val="2166679126"/>
+      </p:ext>
+    </p:extLst>
+  </p:cSld>
+  <p:clrMapOvr>
+    <a:masterClrMapping/>
+  </p:clrMapOvr>
+</p:sld>
+</file>
+
+<file path=ppt/slides/slide5.xml><?xml version="1.0" encoding="utf-8"?>
+<p:sld xmlns:a="http://schemas.openxmlformats.org/drawingml/2006/main" xmlns:r="http://schemas.openxmlformats.org/officeDocument/2006/relationships" xmlns:p="http://schemas.openxmlformats.org/presentationml/2006/main">
+  <p:cSld>
+    <p:spTree>
+      <p:nvGrpSpPr>
+        <p:cNvPr id="1" name=""/>
+        <p:cNvGrpSpPr/>
+        <p:nvPr/>
+      </p:nvGrpSpPr>
+      <p:grpSpPr>
+        <a:xfrm>
+          <a:off x="0" y="0"/>
+          <a:ext cx="0" cy="0"/>
+          <a:chOff x="0" y="0"/>
+          <a:chExt cx="0" cy="0"/>
+        </a:xfrm>
+      </p:grpSpPr>
+      <p:pic>
+        <p:nvPicPr>
+          <p:cNvPr id="11" name="Picture 10">
+            <a:extLst>
+              <a:ext uri="{FF2B5EF4-FFF2-40B4-BE49-F238E27FC236}">
+                <a16:creationId xmlns:a16="http://schemas.microsoft.com/office/drawing/2014/main" id="{7C634008-F1F3-4E67-8DFB-224F4075DE4C}"/>
+              </a:ext>
+            </a:extLst>
+          </p:cNvPr>
+          <p:cNvPicPr>
+            <a:picLocks noChangeAspect="1"/>
+          </p:cNvPicPr>
+          <p:nvPr/>
+        </p:nvPicPr>
+        <p:blipFill>
+          <a:blip r:embed="rId2"/>
+          <a:stretch>
+            <a:fillRect/>
+          </a:stretch>
+        </p:blipFill>
+        <p:spPr>
+          <a:xfrm>
+            <a:off x="5193977" y="2604367"/>
+            <a:ext cx="6003174" cy="3751983"/>
+          </a:xfrm>
+          <a:prstGeom prst="rect">
+            <a:avLst/>
+          </a:prstGeom>
+        </p:spPr>
+      </p:pic>
+      <p:sp>
+        <p:nvSpPr>
+          <p:cNvPr id="2" name="Title 1">
+            <a:extLst>
+              <a:ext uri="{FF2B5EF4-FFF2-40B4-BE49-F238E27FC236}">
+                <a16:creationId xmlns:a16="http://schemas.microsoft.com/office/drawing/2014/main" id="{6BF31FA5-6520-4CA9-9331-30A269AA64D0}"/>
+              </a:ext>
+            </a:extLst>
+          </p:cNvPr>
+          <p:cNvSpPr>
+            <a:spLocks noGrp="1"/>
+          </p:cNvSpPr>
+          <p:nvPr>
+            <p:ph type="title"/>
+          </p:nvPr>
+        </p:nvSpPr>
+        <p:spPr/>
+        <p:txBody>
+          <a:bodyPr>
+            <a:normAutofit/>
+          </a:bodyPr>
+          <a:lstStyle/>
+          <a:p>
+            <a:r>
+              <a:rPr lang="en-US" dirty="0"/>
+              <a:t>New Baseline Measurement</a:t>
+            </a:r>
+            <a:endParaRPr lang="LID4096" dirty="0"/>
+          </a:p>
+        </p:txBody>
+      </p:sp>
+      <p:sp>
+        <p:nvSpPr>
+          <p:cNvPr id="4" name="Date Placeholder 3">
+            <a:extLst>
+              <a:ext uri="{FF2B5EF4-FFF2-40B4-BE49-F238E27FC236}">
+                <a16:creationId xmlns:a16="http://schemas.microsoft.com/office/drawing/2014/main" id="{07956381-EBAB-40C7-AF56-E1C175082244}"/>
+              </a:ext>
+            </a:extLst>
+          </p:cNvPr>
+          <p:cNvSpPr>
+            <a:spLocks noGrp="1"/>
+          </p:cNvSpPr>
+          <p:nvPr>
+            <p:ph type="dt" sz="half" idx="10"/>
+          </p:nvPr>
+        </p:nvSpPr>
+        <p:spPr/>
+        <p:txBody>
+          <a:bodyPr/>
+          <a:lstStyle/>
+          <a:p>
+            <a:fld id="{E1CF8E31-244F-4A6A-A7D5-704B96C48AAE}" type="datetime1">
+              <a:rPr lang="et-EE" smtClean="0"/>
+              <a:t>13.08.2026</a:t>
+            </a:fld>
+            <a:endParaRPr lang="et-EE" dirty="0"/>
+          </a:p>
+        </p:txBody>
+      </p:sp>
+      <p:sp>
+        <p:nvSpPr>
+          <p:cNvPr id="5" name="Footer Placeholder 4">
+            <a:extLst>
+              <a:ext uri="{FF2B5EF4-FFF2-40B4-BE49-F238E27FC236}">
+                <a16:creationId xmlns:a16="http://schemas.microsoft.com/office/drawing/2014/main" id="{33FC2B13-FDDF-49C1-87EB-E43ACEA24E33}"/>
+              </a:ext>
+            </a:extLst>
+          </p:cNvPr>
+          <p:cNvSpPr>
+            <a:spLocks noGrp="1"/>
+          </p:cNvSpPr>
+          <p:nvPr>
+            <p:ph type="ftr" sz="quarter" idx="11"/>
+          </p:nvPr>
+        </p:nvSpPr>
+        <p:spPr/>
+        <p:txBody>
+          <a:bodyPr/>
+          <a:lstStyle/>
+          <a:p>
+            <a:r>
+              <a:rPr lang="et-EE"/>
+              <a:t>Weekly</a:t>
+            </a:r>
+          </a:p>
+        </p:txBody>
+      </p:sp>
+      <p:sp>
+        <p:nvSpPr>
+          <p:cNvPr id="6" name="Slide Number Placeholder 5">
+            <a:extLst>
+              <a:ext uri="{FF2B5EF4-FFF2-40B4-BE49-F238E27FC236}">
+                <a16:creationId xmlns:a16="http://schemas.microsoft.com/office/drawing/2014/main" id="{718F28ED-94A0-4D65-83BA-30F264BA0EC6}"/>
+              </a:ext>
+            </a:extLst>
+          </p:cNvPr>
+          <p:cNvSpPr>
+            <a:spLocks noGrp="1"/>
+          </p:cNvSpPr>
+          <p:nvPr>
+            <p:ph type="sldNum" sz="quarter" idx="12"/>
+          </p:nvPr>
+        </p:nvSpPr>
+        <p:spPr/>
+        <p:txBody>
+          <a:bodyPr/>
+          <a:lstStyle/>
+          <a:p>
+            <a:fld id="{9F39E346-B1F3-4075-BD67-234EF0F10AC6}" type="slidenum">
+              <a:rPr lang="et-EE" smtClean="0"/>
+              <a:pPr/>
+              <a:t>5</a:t>
+            </a:fld>
+            <a:endParaRPr lang="et-EE" dirty="0"/>
+          </a:p>
+        </p:txBody>
+      </p:sp>
+      <p:pic>
+        <p:nvPicPr>
+          <p:cNvPr id="9" name="Content Placeholder 8">
+            <a:extLst>
+              <a:ext uri="{FF2B5EF4-FFF2-40B4-BE49-F238E27FC236}">
+                <a16:creationId xmlns:a16="http://schemas.microsoft.com/office/drawing/2014/main" id="{3F22F3C2-D969-4AAC-B234-8996C263C50E}"/>
+              </a:ext>
+            </a:extLst>
+          </p:cNvPr>
+          <p:cNvPicPr>
+            <a:picLocks noGrp="1" noChangeAspect="1"/>
+          </p:cNvPicPr>
+          <p:nvPr>
+            <p:ph idx="1"/>
+          </p:nvPr>
+        </p:nvPicPr>
+        <p:blipFill>
+          <a:blip r:embed="rId3"/>
+          <a:stretch>
+            <a:fillRect/>
+          </a:stretch>
+        </p:blipFill>
+        <p:spPr>
+          <a:xfrm>
+            <a:off x="0" y="1130531"/>
+            <a:ext cx="8028448" cy="2956566"/>
+          </a:xfrm>
+        </p:spPr>
+      </p:pic>
+    </p:spTree>
+    <p:extLst>
+      <p:ext uri="{BB962C8B-B14F-4D97-AF65-F5344CB8AC3E}">
+        <p14:creationId xmlns:p14="http://schemas.microsoft.com/office/powerpoint/2010/main" val="2848375041"/>
       </p:ext>
     </p:extLst>
   </p:cSld>

--- a/updates.pptx
+++ b/updates.pptx
@@ -5,14 +5,15 @@
     <p:sldMasterId id="2147483708" r:id="rId1"/>
   </p:sldMasterIdLst>
   <p:notesMasterIdLst>
-    <p:notesMasterId r:id="rId7"/>
+    <p:notesMasterId r:id="rId8"/>
   </p:notesMasterIdLst>
   <p:sldIdLst>
     <p:sldId id="263" r:id="rId2"/>
     <p:sldId id="264" r:id="rId3"/>
     <p:sldId id="265" r:id="rId4"/>
-    <p:sldId id="266" r:id="rId5"/>
-    <p:sldId id="267" r:id="rId6"/>
+    <p:sldId id="268" r:id="rId5"/>
+    <p:sldId id="266" r:id="rId6"/>
+    <p:sldId id="267" r:id="rId7"/>
   </p:sldIdLst>
   <p:sldSz cx="12192000" cy="6858000"/>
   <p:notesSz cx="6858000" cy="9144000"/>
@@ -219,7 +220,7 @@
           <a:p>
             <a:fld id="{AB81B2D2-06A2-4596-9391-656CA05E965F}" type="datetimeFigureOut">
               <a:rPr lang="et-EE" smtClean="0"/>
-              <a:t>13.08.2026</a:t>
+              <a:t>14.08.2026</a:t>
             </a:fld>
             <a:endParaRPr lang="et-EE"/>
           </a:p>
@@ -633,7 +634,7 @@
           <a:p>
             <a:fld id="{0E412FDE-1CFE-48F6-820F-9C443C301228}" type="datetime1">
               <a:rPr lang="et-EE" smtClean="0"/>
-              <a:t>13.08.2026</a:t>
+              <a:t>14.08.2026</a:t>
             </a:fld>
             <a:endParaRPr lang="et-EE" dirty="0"/>
           </a:p>
@@ -817,7 +818,7 @@
           <a:p>
             <a:fld id="{B64C0CFC-214E-42F4-8B82-CC6D451BD70F}" type="datetime1">
               <a:rPr lang="et-EE" smtClean="0"/>
-              <a:t>13.08.2026</a:t>
+              <a:t>14.08.2026</a:t>
             </a:fld>
             <a:endParaRPr lang="et-EE"/>
           </a:p>
@@ -1000,7 +1001,7 @@
           <a:p>
             <a:fld id="{5AB58BF1-41C1-47B8-ACAE-F9884B88C63A}" type="datetime1">
               <a:rPr lang="et-EE" smtClean="0"/>
-              <a:t>13.08.2026</a:t>
+              <a:t>14.08.2026</a:t>
             </a:fld>
             <a:endParaRPr lang="et-EE"/>
           </a:p>
@@ -1262,7 +1263,7 @@
           <a:p>
             <a:fld id="{E1CF8E31-244F-4A6A-A7D5-704B96C48AAE}" type="datetime1">
               <a:rPr lang="et-EE" smtClean="0"/>
-              <a:t>13.08.2026</a:t>
+              <a:t>14.08.2026</a:t>
             </a:fld>
             <a:endParaRPr lang="et-EE" dirty="0"/>
           </a:p>
@@ -1974,7 +1975,7 @@
           <a:p>
             <a:fld id="{CF92296B-3A94-4787-AA7D-8DC0AEE88FD4}" type="datetime1">
               <a:rPr lang="et-EE" smtClean="0"/>
-              <a:t>13.08.2026</a:t>
+              <a:t>14.08.2026</a:t>
             </a:fld>
             <a:endParaRPr lang="et-EE"/>
           </a:p>
@@ -2344,7 +2345,7 @@
           <a:p>
             <a:fld id="{185751C1-87AF-4EAC-9696-BB82432B7753}" type="datetime1">
               <a:rPr lang="et-EE" smtClean="0"/>
-              <a:t>13.08.2026</a:t>
+              <a:t>14.08.2026</a:t>
             </a:fld>
             <a:endParaRPr lang="et-EE"/>
           </a:p>
@@ -2442,7 +2443,7 @@
           <a:p>
             <a:fld id="{E493E3B0-4572-4FE0-8E55-6746BFAADA96}" type="datetime1">
               <a:rPr lang="et-EE" smtClean="0"/>
-              <a:t>13.08.2026</a:t>
+              <a:t>14.08.2026</a:t>
             </a:fld>
             <a:endParaRPr lang="et-EE"/>
           </a:p>
@@ -2587,7 +2588,7 @@
           <a:p>
             <a:fld id="{EE4C4D14-98D7-455C-9D0D-2863E0C0AA0D}" type="datetime1">
               <a:rPr lang="et-EE" smtClean="0"/>
-              <a:t>13.08.2026</a:t>
+              <a:t>14.08.2026</a:t>
             </a:fld>
             <a:endParaRPr lang="et-EE"/>
           </a:p>
@@ -2867,7 +2868,7 @@
           <a:p>
             <a:fld id="{94997DBE-8AE5-4A6F-9E25-F62C693D8ED5}" type="datetime1">
               <a:rPr lang="et-EE" smtClean="0"/>
-              <a:t>13.08.2026</a:t>
+              <a:t>14.08.2026</a:t>
             </a:fld>
             <a:endParaRPr lang="et-EE"/>
           </a:p>
@@ -3127,7 +3128,7 @@
           <a:p>
             <a:fld id="{DA3B51F9-97BE-4EFF-9934-D6DB8E40FF5E}" type="datetime1">
               <a:rPr lang="et-EE" smtClean="0"/>
-              <a:t>13.08.2026</a:t>
+              <a:t>14.08.2026</a:t>
             </a:fld>
             <a:endParaRPr lang="et-EE"/>
           </a:p>
@@ -3344,7 +3345,7 @@
           <a:p>
             <a:fld id="{E7C7EEDD-722C-4F14-9239-A37AD281B51F}" type="datetime1">
               <a:rPr lang="et-EE" smtClean="0"/>
-              <a:t>13.08.2026</a:t>
+              <a:t>14.08.2026</a:t>
             </a:fld>
             <a:endParaRPr lang="et-EE" dirty="0"/>
           </a:p>
@@ -4083,7 +4084,7 @@
           <a:p>
             <a:fld id="{E1CF8E31-244F-4A6A-A7D5-704B96C48AAE}" type="datetime1">
               <a:rPr lang="et-EE" smtClean="0"/>
-              <a:t>13.08.2026</a:t>
+              <a:t>14.08.2026</a:t>
             </a:fld>
             <a:endParaRPr lang="et-EE" dirty="0"/>
           </a:p>
@@ -4391,6 +4392,344 @@
           <a:chExt cx="0" cy="0"/>
         </a:xfrm>
       </p:grpSpPr>
+      <p:sp>
+        <p:nvSpPr>
+          <p:cNvPr id="2" name="Title 1">
+            <a:extLst>
+              <a:ext uri="{FF2B5EF4-FFF2-40B4-BE49-F238E27FC236}">
+                <a16:creationId xmlns:a16="http://schemas.microsoft.com/office/drawing/2014/main" id="{6BF31FA5-6520-4CA9-9331-30A269AA64D0}"/>
+              </a:ext>
+            </a:extLst>
+          </p:cNvPr>
+          <p:cNvSpPr>
+            <a:spLocks noGrp="1"/>
+          </p:cNvSpPr>
+          <p:nvPr>
+            <p:ph type="title"/>
+          </p:nvPr>
+        </p:nvSpPr>
+        <p:spPr>
+          <a:xfrm>
+            <a:off x="224443" y="241069"/>
+            <a:ext cx="11082554" cy="889462"/>
+          </a:xfrm>
+        </p:spPr>
+        <p:txBody>
+          <a:bodyPr>
+            <a:normAutofit fontScale="90000"/>
+          </a:bodyPr>
+          <a:lstStyle/>
+          <a:p>
+            <a:r>
+              <a:rPr lang="en-US" dirty="0"/>
+              <a:t>Context: we will likely need GHz modulation for LISA-like clock noise removal</a:t>
+            </a:r>
+            <a:endParaRPr lang="LID4096" dirty="0"/>
+          </a:p>
+        </p:txBody>
+      </p:sp>
+      <p:sp>
+        <p:nvSpPr>
+          <p:cNvPr id="4" name="Date Placeholder 3">
+            <a:extLst>
+              <a:ext uri="{FF2B5EF4-FFF2-40B4-BE49-F238E27FC236}">
+                <a16:creationId xmlns:a16="http://schemas.microsoft.com/office/drawing/2014/main" id="{07956381-EBAB-40C7-AF56-E1C175082244}"/>
+              </a:ext>
+            </a:extLst>
+          </p:cNvPr>
+          <p:cNvSpPr>
+            <a:spLocks noGrp="1"/>
+          </p:cNvSpPr>
+          <p:nvPr>
+            <p:ph type="dt" sz="half" idx="10"/>
+          </p:nvPr>
+        </p:nvSpPr>
+        <p:spPr/>
+        <p:txBody>
+          <a:bodyPr/>
+          <a:lstStyle/>
+          <a:p>
+            <a:fld id="{E1CF8E31-244F-4A6A-A7D5-704B96C48AAE}" type="datetime1">
+              <a:rPr lang="et-EE" smtClean="0"/>
+              <a:t>14.08.2026</a:t>
+            </a:fld>
+            <a:endParaRPr lang="et-EE" dirty="0"/>
+          </a:p>
+        </p:txBody>
+      </p:sp>
+      <p:sp>
+        <p:nvSpPr>
+          <p:cNvPr id="5" name="Footer Placeholder 4">
+            <a:extLst>
+              <a:ext uri="{FF2B5EF4-FFF2-40B4-BE49-F238E27FC236}">
+                <a16:creationId xmlns:a16="http://schemas.microsoft.com/office/drawing/2014/main" id="{33FC2B13-FDDF-49C1-87EB-E43ACEA24E33}"/>
+              </a:ext>
+            </a:extLst>
+          </p:cNvPr>
+          <p:cNvSpPr>
+            <a:spLocks noGrp="1"/>
+          </p:cNvSpPr>
+          <p:nvPr>
+            <p:ph type="ftr" sz="quarter" idx="11"/>
+          </p:nvPr>
+        </p:nvSpPr>
+        <p:spPr/>
+        <p:txBody>
+          <a:bodyPr/>
+          <a:lstStyle/>
+          <a:p>
+            <a:r>
+              <a:rPr lang="et-EE"/>
+              <a:t>Weekly</a:t>
+            </a:r>
+          </a:p>
+        </p:txBody>
+      </p:sp>
+      <p:sp>
+        <p:nvSpPr>
+          <p:cNvPr id="6" name="Slide Number Placeholder 5">
+            <a:extLst>
+              <a:ext uri="{FF2B5EF4-FFF2-40B4-BE49-F238E27FC236}">
+                <a16:creationId xmlns:a16="http://schemas.microsoft.com/office/drawing/2014/main" id="{718F28ED-94A0-4D65-83BA-30F264BA0EC6}"/>
+              </a:ext>
+            </a:extLst>
+          </p:cNvPr>
+          <p:cNvSpPr>
+            <a:spLocks noGrp="1"/>
+          </p:cNvSpPr>
+          <p:nvPr>
+            <p:ph type="sldNum" sz="quarter" idx="12"/>
+          </p:nvPr>
+        </p:nvSpPr>
+        <p:spPr/>
+        <p:txBody>
+          <a:bodyPr/>
+          <a:lstStyle/>
+          <a:p>
+            <a:fld id="{9F39E346-B1F3-4075-BD67-234EF0F10AC6}" type="slidenum">
+              <a:rPr lang="et-EE" smtClean="0"/>
+              <a:pPr/>
+              <a:t>3</a:t>
+            </a:fld>
+            <a:endParaRPr lang="et-EE" dirty="0"/>
+          </a:p>
+        </p:txBody>
+      </p:sp>
+      <p:pic>
+        <p:nvPicPr>
+          <p:cNvPr id="9" name="Content Placeholder 8">
+            <a:extLst>
+              <a:ext uri="{FF2B5EF4-FFF2-40B4-BE49-F238E27FC236}">
+                <a16:creationId xmlns:a16="http://schemas.microsoft.com/office/drawing/2014/main" id="{9B757E07-BA21-4A73-9D08-C19961B6F706}"/>
+              </a:ext>
+            </a:extLst>
+          </p:cNvPr>
+          <p:cNvPicPr>
+            <a:picLocks noGrp="1" noChangeAspect="1"/>
+          </p:cNvPicPr>
+          <p:nvPr>
+            <p:ph idx="1"/>
+          </p:nvPr>
+        </p:nvPicPr>
+        <p:blipFill>
+          <a:blip r:embed="rId2"/>
+          <a:stretch>
+            <a:fillRect/>
+          </a:stretch>
+        </p:blipFill>
+        <p:spPr>
+          <a:xfrm>
+            <a:off x="2103086" y="1769225"/>
+            <a:ext cx="7825349" cy="2825156"/>
+          </a:xfrm>
+        </p:spPr>
+      </p:pic>
+      <p:sp>
+        <p:nvSpPr>
+          <p:cNvPr id="10" name="Rectangle 9">
+            <a:extLst>
+              <a:ext uri="{FF2B5EF4-FFF2-40B4-BE49-F238E27FC236}">
+                <a16:creationId xmlns:a16="http://schemas.microsoft.com/office/drawing/2014/main" id="{A6C1A258-C3E0-41EE-9305-E78E57BC2FEB}"/>
+              </a:ext>
+            </a:extLst>
+          </p:cNvPr>
+          <p:cNvSpPr/>
+          <p:nvPr/>
+        </p:nvSpPr>
+        <p:spPr>
+          <a:xfrm>
+            <a:off x="3355895" y="3673432"/>
+            <a:ext cx="603411" cy="682319"/>
+          </a:xfrm>
+          <a:prstGeom prst="rect">
+            <a:avLst/>
+          </a:prstGeom>
+          <a:noFill/>
+          <a:ln w="38100">
+            <a:solidFill>
+              <a:srgbClr val="C00000"/>
+            </a:solidFill>
+          </a:ln>
+        </p:spPr>
+        <p:style>
+          <a:lnRef idx="2">
+            <a:schemeClr val="accent1">
+              <a:shade val="50000"/>
+            </a:schemeClr>
+          </a:lnRef>
+          <a:fillRef idx="1">
+            <a:schemeClr val="accent1"/>
+          </a:fillRef>
+          <a:effectRef idx="0">
+            <a:schemeClr val="accent1"/>
+          </a:effectRef>
+          <a:fontRef idx="minor">
+            <a:schemeClr val="lt1"/>
+          </a:fontRef>
+        </p:style>
+        <p:txBody>
+          <a:bodyPr rtlCol="0" anchor="ctr"/>
+          <a:lstStyle/>
+          <a:p>
+            <a:pPr algn="ctr"/>
+            <a:endParaRPr lang="LID4096"/>
+          </a:p>
+        </p:txBody>
+      </p:sp>
+      <p:sp>
+        <p:nvSpPr>
+          <p:cNvPr id="11" name="TextBox 10">
+            <a:extLst>
+              <a:ext uri="{FF2B5EF4-FFF2-40B4-BE49-F238E27FC236}">
+                <a16:creationId xmlns:a16="http://schemas.microsoft.com/office/drawing/2014/main" id="{9A2DFB99-5ED6-4512-B73E-D0113431F0FF}"/>
+              </a:ext>
+            </a:extLst>
+          </p:cNvPr>
+          <p:cNvSpPr txBox="1"/>
+          <p:nvPr/>
+        </p:nvSpPr>
+        <p:spPr>
+          <a:xfrm>
+            <a:off x="2534326" y="4799439"/>
+            <a:ext cx="3272346" cy="954107"/>
+          </a:xfrm>
+          <a:prstGeom prst="rect">
+            <a:avLst/>
+          </a:prstGeom>
+          <a:noFill/>
+        </p:spPr>
+        <p:txBody>
+          <a:bodyPr wrap="square" rtlCol="0">
+            <a:spAutoFit/>
+          </a:bodyPr>
+          <a:lstStyle/>
+          <a:p>
+            <a:pPr algn="l"/>
+            <a:r>
+              <a:rPr lang="en-US" sz="1400" dirty="0">
+                <a:solidFill>
+                  <a:schemeClr val="bg1"/>
+                </a:solidFill>
+                <a:latin typeface="Arial" panose="020B0604020202020204" pitchFamily="34" charset="0"/>
+                <a:cs typeface="Arial" panose="020B0604020202020204" pitchFamily="34" charset="0"/>
+              </a:rPr>
+              <a:t>We can get GHz SBs and still use the delay line with a 60 MHz ADC bandwidth by modulating the reference laser as well</a:t>
+            </a:r>
+            <a:endParaRPr lang="LID4096" sz="1400" dirty="0">
+              <a:solidFill>
+                <a:schemeClr val="bg1"/>
+              </a:solidFill>
+              <a:latin typeface="Arial" panose="020B0604020202020204" pitchFamily="34" charset="0"/>
+              <a:cs typeface="Arial" panose="020B0604020202020204" pitchFamily="34" charset="0"/>
+            </a:endParaRPr>
+          </a:p>
+        </p:txBody>
+      </p:sp>
+      <p:sp>
+        <p:nvSpPr>
+          <p:cNvPr id="14" name="TextBox 13">
+            <a:extLst>
+              <a:ext uri="{FF2B5EF4-FFF2-40B4-BE49-F238E27FC236}">
+                <a16:creationId xmlns:a16="http://schemas.microsoft.com/office/drawing/2014/main" id="{706B7A0B-5670-4331-89EA-C4EBE76479BB}"/>
+              </a:ext>
+            </a:extLst>
+          </p:cNvPr>
+          <p:cNvSpPr txBox="1"/>
+          <p:nvPr/>
+        </p:nvSpPr>
+        <p:spPr>
+          <a:xfrm>
+            <a:off x="5880164" y="4753272"/>
+            <a:ext cx="3272346" cy="523220"/>
+          </a:xfrm>
+          <a:prstGeom prst="rect">
+            <a:avLst/>
+          </a:prstGeom>
+          <a:noFill/>
+        </p:spPr>
+        <p:txBody>
+          <a:bodyPr wrap="square" rtlCol="0">
+            <a:spAutoFit/>
+          </a:bodyPr>
+          <a:lstStyle/>
+          <a:p>
+            <a:pPr algn="l"/>
+            <a:r>
+              <a:rPr lang="en-US" sz="1400" dirty="0">
+                <a:solidFill>
+                  <a:schemeClr val="bg1"/>
+                </a:solidFill>
+                <a:highlight>
+                  <a:srgbClr val="FF00FF"/>
+                </a:highlight>
+                <a:latin typeface="Arial" panose="020B0604020202020204" pitchFamily="34" charset="0"/>
+                <a:cs typeface="Arial" panose="020B0604020202020204" pitchFamily="34" charset="0"/>
+              </a:rPr>
+              <a:t>Question is, where do we get the modulating tone from?</a:t>
+            </a:r>
+            <a:endParaRPr lang="LID4096" sz="1400" dirty="0">
+              <a:solidFill>
+                <a:schemeClr val="bg1"/>
+              </a:solidFill>
+              <a:highlight>
+                <a:srgbClr val="FF00FF"/>
+              </a:highlight>
+              <a:latin typeface="Arial" panose="020B0604020202020204" pitchFamily="34" charset="0"/>
+              <a:cs typeface="Arial" panose="020B0604020202020204" pitchFamily="34" charset="0"/>
+            </a:endParaRPr>
+          </a:p>
+        </p:txBody>
+      </p:sp>
+    </p:spTree>
+    <p:extLst>
+      <p:ext uri="{BB962C8B-B14F-4D97-AF65-F5344CB8AC3E}">
+        <p14:creationId xmlns:p14="http://schemas.microsoft.com/office/powerpoint/2010/main" val="3942996813"/>
+      </p:ext>
+    </p:extLst>
+  </p:cSld>
+  <p:clrMapOvr>
+    <a:masterClrMapping/>
+  </p:clrMapOvr>
+</p:sld>
+</file>
+
+<file path=ppt/slides/slide4.xml><?xml version="1.0" encoding="utf-8"?>
+<p:sld xmlns:a="http://schemas.openxmlformats.org/drawingml/2006/main" xmlns:r="http://schemas.openxmlformats.org/officeDocument/2006/relationships" xmlns:p="http://schemas.openxmlformats.org/presentationml/2006/main">
+  <p:cSld>
+    <p:spTree>
+      <p:nvGrpSpPr>
+        <p:cNvPr id="1" name=""/>
+        <p:cNvGrpSpPr/>
+        <p:nvPr/>
+      </p:nvGrpSpPr>
+      <p:grpSpPr>
+        <a:xfrm>
+          <a:off x="0" y="0"/>
+          <a:ext cx="0" cy="0"/>
+          <a:chOff x="0" y="0"/>
+          <a:chExt cx="0" cy="0"/>
+        </a:xfrm>
+      </p:grpSpPr>
       <p:pic>
         <p:nvPicPr>
           <p:cNvPr id="17" name="Picture 16">
@@ -4407,14 +4746,13 @@
         </p:nvPicPr>
         <p:blipFill>
           <a:blip r:embed="rId2"/>
-          <a:stretch>
-            <a:fillRect/>
-          </a:stretch>
+          <a:srcRect/>
+          <a:stretch/>
         </p:blipFill>
         <p:spPr>
           <a:xfrm>
             <a:off x="4822868" y="2453767"/>
-            <a:ext cx="6661063" cy="4163164"/>
+            <a:ext cx="6661062" cy="4163164"/>
           </a:xfrm>
           <a:prstGeom prst="rect">
             <a:avLst/>
@@ -4446,7 +4784,7 @@
           <a:p>
             <a:r>
               <a:rPr lang="en-US" dirty="0"/>
-              <a:t>Typical Baseline Measurement</a:t>
+              <a:t>Context: Typical Baseline Measurement</a:t>
             </a:r>
             <a:endParaRPr lang="LID4096" dirty="0"/>
           </a:p>
@@ -4475,7 +4813,7 @@
           <a:p>
             <a:fld id="{E1CF8E31-244F-4A6A-A7D5-704B96C48AAE}" type="datetime1">
               <a:rPr lang="et-EE" smtClean="0"/>
-              <a:t>13.08.2026</a:t>
+              <a:t>14.08.2026</a:t>
             </a:fld>
             <a:endParaRPr lang="et-EE" dirty="0"/>
           </a:p>
@@ -4533,7 +4871,7 @@
             <a:fld id="{9F39E346-B1F3-4075-BD67-234EF0F10AC6}" type="slidenum">
               <a:rPr lang="et-EE" smtClean="0"/>
               <a:pPr/>
-              <a:t>3</a:t>
+              <a:t>4</a:t>
             </a:fld>
             <a:endParaRPr lang="et-EE" dirty="0"/>
           </a:p>
@@ -4571,7 +4909,7 @@
     </p:spTree>
     <p:extLst>
       <p:ext uri="{BB962C8B-B14F-4D97-AF65-F5344CB8AC3E}">
-        <p14:creationId xmlns:p14="http://schemas.microsoft.com/office/powerpoint/2010/main" val="3942996813"/>
+        <p14:creationId xmlns:p14="http://schemas.microsoft.com/office/powerpoint/2010/main" val="2496338198"/>
       </p:ext>
     </p:extLst>
   </p:cSld>
@@ -4581,7 +4919,7 @@
 </p:sld>
 </file>
 
-<file path=ppt/slides/slide4.xml><?xml version="1.0" encoding="utf-8"?>
+<file path=ppt/slides/slide5.xml><?xml version="1.0" encoding="utf-8"?>
 <p:sld xmlns:a="http://schemas.openxmlformats.org/drawingml/2006/main" xmlns:r="http://schemas.openxmlformats.org/officeDocument/2006/relationships" xmlns:p="http://schemas.openxmlformats.org/presentationml/2006/main">
   <p:cSld>
     <p:spTree>
@@ -4620,7 +4958,7 @@
         </p:blipFill>
         <p:spPr>
           <a:xfrm>
-            <a:off x="623446" y="5225872"/>
+            <a:off x="639305" y="5341706"/>
             <a:ext cx="6264070" cy="1102653"/>
           </a:xfrm>
           <a:prstGeom prst="rect">
@@ -4650,7 +4988,7 @@
         </p:blipFill>
         <p:spPr>
           <a:xfrm>
-            <a:off x="5569216" y="1977020"/>
+            <a:off x="5624065" y="2148760"/>
             <a:ext cx="5928630" cy="3705394"/>
           </a:xfrm>
           <a:prstGeom prst="rect">
@@ -4677,13 +5015,13 @@
         <p:spPr/>
         <p:txBody>
           <a:bodyPr>
-            <a:normAutofit/>
+            <a:normAutofit fontScale="90000"/>
           </a:bodyPr>
           <a:lstStyle/>
           <a:p>
             <a:r>
               <a:rPr lang="en-US" dirty="0"/>
-              <a:t>New Baseline Measurement</a:t>
+              <a:t>Baseline Measurement with SYS REF modulation</a:t>
             </a:r>
             <a:endParaRPr lang="LID4096" dirty="0"/>
           </a:p>
@@ -4712,7 +5050,7 @@
           <a:p>
             <a:fld id="{E1CF8E31-244F-4A6A-A7D5-704B96C48AAE}" type="datetime1">
               <a:rPr lang="et-EE" smtClean="0"/>
-              <a:t>13.08.2026</a:t>
+              <a:t>14.08.2026</a:t>
             </a:fld>
             <a:endParaRPr lang="et-EE" dirty="0"/>
           </a:p>
@@ -4770,7 +5108,7 @@
             <a:fld id="{9F39E346-B1F3-4075-BD67-234EF0F10AC6}" type="slidenum">
               <a:rPr lang="et-EE" smtClean="0"/>
               <a:pPr/>
-              <a:t>4</a:t>
+              <a:t>5</a:t>
             </a:fld>
             <a:endParaRPr lang="et-EE" dirty="0"/>
           </a:p>
@@ -4799,8 +5137,8 @@
         </p:blipFill>
         <p:spPr>
           <a:xfrm>
-            <a:off x="301848" y="845719"/>
-            <a:ext cx="7147575" cy="2983998"/>
+            <a:off x="-399038" y="759370"/>
+            <a:ext cx="8464191" cy="3533664"/>
           </a:xfrm>
         </p:spPr>
       </p:pic>
@@ -4818,7 +5156,7 @@
         </p:nvSpPr>
         <p:spPr>
           <a:xfrm>
-            <a:off x="1095810" y="2942789"/>
+            <a:off x="890267" y="3675828"/>
             <a:ext cx="2942790" cy="307777"/>
           </a:xfrm>
           <a:prstGeom prst="rect">
@@ -4844,7 +5182,20 @@
                 <a:latin typeface="Arial" panose="020B0604020202020204" pitchFamily="34" charset="0"/>
                 <a:cs typeface="Arial" panose="020B0604020202020204" pitchFamily="34" charset="0"/>
               </a:rPr>
-              <a:t>SYS REF is limited to 300 MHz </a:t>
+              <a:t>SYS REF is limited to 375 MH</a:t>
+            </a:r>
+            <a:r>
+              <a:rPr lang="et-EE" sz="1400" dirty="0">
+                <a:solidFill>
+                  <a:schemeClr val="bg1"/>
+                </a:solidFill>
+                <a:highlight>
+                  <a:srgbClr val="FF00FF"/>
+                </a:highlight>
+                <a:latin typeface="Arial" panose="020B0604020202020204" pitchFamily="34" charset="0"/>
+                <a:cs typeface="Arial" panose="020B0604020202020204" pitchFamily="34" charset="0"/>
+              </a:rPr>
+              <a:t>z</a:t>
             </a:r>
             <a:endParaRPr lang="LID4096" sz="1400" dirty="0">
               <a:solidFill>
@@ -4873,7 +5224,7 @@
         </p:nvSpPr>
         <p:spPr>
           <a:xfrm>
-            <a:off x="301848" y="4939145"/>
+            <a:off x="314376" y="5101602"/>
             <a:ext cx="2942790" cy="307777"/>
           </a:xfrm>
           <a:prstGeom prst="rect">
@@ -4921,7 +5272,7 @@
 </p:sld>
 </file>
 
-<file path=ppt/slides/slide5.xml><?xml version="1.0" encoding="utf-8"?>
+<file path=ppt/slides/slide6.xml><?xml version="1.0" encoding="utf-8"?>
 <p:sld xmlns:a="http://schemas.openxmlformats.org/drawingml/2006/main" xmlns:r="http://schemas.openxmlformats.org/officeDocument/2006/relationships" xmlns:p="http://schemas.openxmlformats.org/presentationml/2006/main">
   <p:cSld>
     <p:spTree>
@@ -4954,14 +5305,13 @@
         </p:nvPicPr>
         <p:blipFill>
           <a:blip r:embed="rId2"/>
-          <a:stretch>
-            <a:fillRect/>
-          </a:stretch>
+          <a:srcRect/>
+          <a:stretch/>
         </p:blipFill>
         <p:spPr>
           <a:xfrm>
             <a:off x="5193977" y="2604367"/>
-            <a:ext cx="6003174" cy="3751983"/>
+            <a:ext cx="6003173" cy="3751983"/>
           </a:xfrm>
           <a:prstGeom prst="rect">
             <a:avLst/>
@@ -4993,7 +5343,7 @@
           <a:p>
             <a:r>
               <a:rPr lang="en-US" dirty="0"/>
-              <a:t>New Baseline Measurement</a:t>
+              <a:t>Baseline Measurement with DDS modulation</a:t>
             </a:r>
             <a:endParaRPr lang="LID4096" dirty="0"/>
           </a:p>
@@ -5022,7 +5372,7 @@
           <a:p>
             <a:fld id="{E1CF8E31-244F-4A6A-A7D5-704B96C48AAE}" type="datetime1">
               <a:rPr lang="et-EE" smtClean="0"/>
-              <a:t>13.08.2026</a:t>
+              <a:t>14.08.2026</a:t>
             </a:fld>
             <a:endParaRPr lang="et-EE" dirty="0"/>
           </a:p>
@@ -5080,7 +5430,7 @@
             <a:fld id="{9F39E346-B1F3-4075-BD67-234EF0F10AC6}" type="slidenum">
               <a:rPr lang="et-EE" smtClean="0"/>
               <a:pPr/>
-              <a:t>5</a:t>
+              <a:t>6</a:t>
             </a:fld>
             <a:endParaRPr lang="et-EE" dirty="0"/>
           </a:p>
@@ -5110,8 +5460,8 @@
         </p:blipFill>
         <p:spPr>
           <a:xfrm>
-            <a:off x="0" y="1130531"/>
-            <a:ext cx="8028448" cy="2956566"/>
+            <a:off x="-570972" y="852032"/>
+            <a:ext cx="9219144" cy="3395053"/>
           </a:xfrm>
         </p:spPr>
       </p:pic>

--- a/updates.pptx
+++ b/updates.pptx
@@ -5,7 +5,7 @@
     <p:sldMasterId id="2147483708" r:id="rId1"/>
   </p:sldMasterIdLst>
   <p:notesMasterIdLst>
-    <p:notesMasterId r:id="rId8"/>
+    <p:notesMasterId r:id="rId10"/>
   </p:notesMasterIdLst>
   <p:sldIdLst>
     <p:sldId id="263" r:id="rId2"/>
@@ -14,6 +14,8 @@
     <p:sldId id="268" r:id="rId5"/>
     <p:sldId id="266" r:id="rId6"/>
     <p:sldId id="267" r:id="rId7"/>
+    <p:sldId id="269" r:id="rId8"/>
+    <p:sldId id="270" r:id="rId9"/>
   </p:sldIdLst>
   <p:sldSz cx="12192000" cy="6858000"/>
   <p:notesSz cx="6858000" cy="9144000"/>
@@ -220,7 +222,7 @@
           <a:p>
             <a:fld id="{AB81B2D2-06A2-4596-9391-656CA05E965F}" type="datetimeFigureOut">
               <a:rPr lang="et-EE" smtClean="0"/>
-              <a:t>14.08.2026</a:t>
+              <a:t>21.08.2026</a:t>
             </a:fld>
             <a:endParaRPr lang="et-EE"/>
           </a:p>
@@ -634,7 +636,7 @@
           <a:p>
             <a:fld id="{0E412FDE-1CFE-48F6-820F-9C443C301228}" type="datetime1">
               <a:rPr lang="et-EE" smtClean="0"/>
-              <a:t>14.08.2026</a:t>
+              <a:t>21.08.2026</a:t>
             </a:fld>
             <a:endParaRPr lang="et-EE" dirty="0"/>
           </a:p>
@@ -818,7 +820,7 @@
           <a:p>
             <a:fld id="{B64C0CFC-214E-42F4-8B82-CC6D451BD70F}" type="datetime1">
               <a:rPr lang="et-EE" smtClean="0"/>
-              <a:t>14.08.2026</a:t>
+              <a:t>21.08.2026</a:t>
             </a:fld>
             <a:endParaRPr lang="et-EE"/>
           </a:p>
@@ -1001,7 +1003,7 @@
           <a:p>
             <a:fld id="{5AB58BF1-41C1-47B8-ACAE-F9884B88C63A}" type="datetime1">
               <a:rPr lang="et-EE" smtClean="0"/>
-              <a:t>14.08.2026</a:t>
+              <a:t>21.08.2026</a:t>
             </a:fld>
             <a:endParaRPr lang="et-EE"/>
           </a:p>
@@ -1263,7 +1265,7 @@
           <a:p>
             <a:fld id="{E1CF8E31-244F-4A6A-A7D5-704B96C48AAE}" type="datetime1">
               <a:rPr lang="et-EE" smtClean="0"/>
-              <a:t>14.08.2026</a:t>
+              <a:t>21.08.2026</a:t>
             </a:fld>
             <a:endParaRPr lang="et-EE" dirty="0"/>
           </a:p>
@@ -1975,7 +1977,7 @@
           <a:p>
             <a:fld id="{CF92296B-3A94-4787-AA7D-8DC0AEE88FD4}" type="datetime1">
               <a:rPr lang="et-EE" smtClean="0"/>
-              <a:t>14.08.2026</a:t>
+              <a:t>21.08.2026</a:t>
             </a:fld>
             <a:endParaRPr lang="et-EE"/>
           </a:p>
@@ -2345,7 +2347,7 @@
           <a:p>
             <a:fld id="{185751C1-87AF-4EAC-9696-BB82432B7753}" type="datetime1">
               <a:rPr lang="et-EE" smtClean="0"/>
-              <a:t>14.08.2026</a:t>
+              <a:t>21.08.2026</a:t>
             </a:fld>
             <a:endParaRPr lang="et-EE"/>
           </a:p>
@@ -2443,7 +2445,7 @@
           <a:p>
             <a:fld id="{E493E3B0-4572-4FE0-8E55-6746BFAADA96}" type="datetime1">
               <a:rPr lang="et-EE" smtClean="0"/>
-              <a:t>14.08.2026</a:t>
+              <a:t>21.08.2026</a:t>
             </a:fld>
             <a:endParaRPr lang="et-EE"/>
           </a:p>
@@ -2588,7 +2590,7 @@
           <a:p>
             <a:fld id="{EE4C4D14-98D7-455C-9D0D-2863E0C0AA0D}" type="datetime1">
               <a:rPr lang="et-EE" smtClean="0"/>
-              <a:t>14.08.2026</a:t>
+              <a:t>21.08.2026</a:t>
             </a:fld>
             <a:endParaRPr lang="et-EE"/>
           </a:p>
@@ -2868,7 +2870,7 @@
           <a:p>
             <a:fld id="{94997DBE-8AE5-4A6F-9E25-F62C693D8ED5}" type="datetime1">
               <a:rPr lang="et-EE" smtClean="0"/>
-              <a:t>14.08.2026</a:t>
+              <a:t>21.08.2026</a:t>
             </a:fld>
             <a:endParaRPr lang="et-EE"/>
           </a:p>
@@ -3128,7 +3130,7 @@
           <a:p>
             <a:fld id="{DA3B51F9-97BE-4EFF-9934-D6DB8E40FF5E}" type="datetime1">
               <a:rPr lang="et-EE" smtClean="0"/>
-              <a:t>14.08.2026</a:t>
+              <a:t>21.08.2026</a:t>
             </a:fld>
             <a:endParaRPr lang="et-EE"/>
           </a:p>
@@ -3345,7 +3347,7 @@
           <a:p>
             <a:fld id="{E7C7EEDD-722C-4F14-9239-A37AD281B51F}" type="datetime1">
               <a:rPr lang="et-EE" smtClean="0"/>
-              <a:t>14.08.2026</a:t>
+              <a:t>21.08.2026</a:t>
             </a:fld>
             <a:endParaRPr lang="et-EE" dirty="0"/>
           </a:p>
@@ -4084,7 +4086,7 @@
           <a:p>
             <a:fld id="{E1CF8E31-244F-4A6A-A7D5-704B96C48AAE}" type="datetime1">
               <a:rPr lang="et-EE" smtClean="0"/>
-              <a:t>14.08.2026</a:t>
+              <a:t>21.08.2026</a:t>
             </a:fld>
             <a:endParaRPr lang="et-EE" dirty="0"/>
           </a:p>
@@ -4451,7 +4453,7 @@
           <a:p>
             <a:fld id="{E1CF8E31-244F-4A6A-A7D5-704B96C48AAE}" type="datetime1">
               <a:rPr lang="et-EE" smtClean="0"/>
-              <a:t>14.08.2026</a:t>
+              <a:t>21.08.2026</a:t>
             </a:fld>
             <a:endParaRPr lang="et-EE" dirty="0"/>
           </a:p>
@@ -4813,7 +4815,7 @@
           <a:p>
             <a:fld id="{E1CF8E31-244F-4A6A-A7D5-704B96C48AAE}" type="datetime1">
               <a:rPr lang="et-EE" smtClean="0"/>
-              <a:t>14.08.2026</a:t>
+              <a:t>21.08.2026</a:t>
             </a:fld>
             <a:endParaRPr lang="et-EE" dirty="0"/>
           </a:p>
@@ -5050,7 +5052,7 @@
           <a:p>
             <a:fld id="{E1CF8E31-244F-4A6A-A7D5-704B96C48AAE}" type="datetime1">
               <a:rPr lang="et-EE" smtClean="0"/>
-              <a:t>14.08.2026</a:t>
+              <a:t>21.08.2026</a:t>
             </a:fld>
             <a:endParaRPr lang="et-EE" dirty="0"/>
           </a:p>
@@ -5372,7 +5374,7 @@
           <a:p>
             <a:fld id="{E1CF8E31-244F-4A6A-A7D5-704B96C48AAE}" type="datetime1">
               <a:rPr lang="et-EE" smtClean="0"/>
-              <a:t>14.08.2026</a:t>
+              <a:t>21.08.2026</a:t>
             </a:fld>
             <a:endParaRPr lang="et-EE" dirty="0"/>
           </a:p>
@@ -5469,6 +5471,388 @@
     <p:extLst>
       <p:ext uri="{BB962C8B-B14F-4D97-AF65-F5344CB8AC3E}">
         <p14:creationId xmlns:p14="http://schemas.microsoft.com/office/powerpoint/2010/main" val="2848375041"/>
+      </p:ext>
+    </p:extLst>
+  </p:cSld>
+  <p:clrMapOvr>
+    <a:masterClrMapping/>
+  </p:clrMapOvr>
+</p:sld>
+</file>
+
+<file path=ppt/slides/slide7.xml><?xml version="1.0" encoding="utf-8"?>
+<p:sld xmlns:a="http://schemas.openxmlformats.org/drawingml/2006/main" xmlns:r="http://schemas.openxmlformats.org/officeDocument/2006/relationships" xmlns:p="http://schemas.openxmlformats.org/presentationml/2006/main">
+  <p:cSld>
+    <p:spTree>
+      <p:nvGrpSpPr>
+        <p:cNvPr id="1" name=""/>
+        <p:cNvGrpSpPr/>
+        <p:nvPr/>
+      </p:nvGrpSpPr>
+      <p:grpSpPr>
+        <a:xfrm>
+          <a:off x="0" y="0"/>
+          <a:ext cx="0" cy="0"/>
+          <a:chOff x="0" y="0"/>
+          <a:chExt cx="0" cy="0"/>
+        </a:xfrm>
+      </p:grpSpPr>
+      <p:sp>
+        <p:nvSpPr>
+          <p:cNvPr id="2" name="Title 1">
+            <a:extLst>
+              <a:ext uri="{FF2B5EF4-FFF2-40B4-BE49-F238E27FC236}">
+                <a16:creationId xmlns:a16="http://schemas.microsoft.com/office/drawing/2014/main" id="{6BF31FA5-6520-4CA9-9331-30A269AA64D0}"/>
+              </a:ext>
+            </a:extLst>
+          </p:cNvPr>
+          <p:cNvSpPr>
+            <a:spLocks noGrp="1"/>
+          </p:cNvSpPr>
+          <p:nvPr>
+            <p:ph type="title"/>
+          </p:nvPr>
+        </p:nvSpPr>
+        <p:spPr/>
+        <p:txBody>
+          <a:bodyPr>
+            <a:normAutofit/>
+          </a:bodyPr>
+          <a:lstStyle/>
+          <a:p>
+            <a:r>
+              <a:rPr lang="en-US" dirty="0"/>
+              <a:t>TDI1 Michelson X Combination</a:t>
+            </a:r>
+            <a:endParaRPr lang="LID4096" dirty="0"/>
+          </a:p>
+        </p:txBody>
+      </p:sp>
+      <p:sp>
+        <p:nvSpPr>
+          <p:cNvPr id="4" name="Date Placeholder 3">
+            <a:extLst>
+              <a:ext uri="{FF2B5EF4-FFF2-40B4-BE49-F238E27FC236}">
+                <a16:creationId xmlns:a16="http://schemas.microsoft.com/office/drawing/2014/main" id="{07956381-EBAB-40C7-AF56-E1C175082244}"/>
+              </a:ext>
+            </a:extLst>
+          </p:cNvPr>
+          <p:cNvSpPr>
+            <a:spLocks noGrp="1"/>
+          </p:cNvSpPr>
+          <p:nvPr>
+            <p:ph type="dt" sz="half" idx="10"/>
+          </p:nvPr>
+        </p:nvSpPr>
+        <p:spPr/>
+        <p:txBody>
+          <a:bodyPr/>
+          <a:lstStyle/>
+          <a:p>
+            <a:fld id="{E1CF8E31-244F-4A6A-A7D5-704B96C48AAE}" type="datetime1">
+              <a:rPr lang="et-EE" smtClean="0"/>
+              <a:t>21.08.2026</a:t>
+            </a:fld>
+            <a:endParaRPr lang="et-EE" dirty="0"/>
+          </a:p>
+        </p:txBody>
+      </p:sp>
+      <p:sp>
+        <p:nvSpPr>
+          <p:cNvPr id="5" name="Footer Placeholder 4">
+            <a:extLst>
+              <a:ext uri="{FF2B5EF4-FFF2-40B4-BE49-F238E27FC236}">
+                <a16:creationId xmlns:a16="http://schemas.microsoft.com/office/drawing/2014/main" id="{33FC2B13-FDDF-49C1-87EB-E43ACEA24E33}"/>
+              </a:ext>
+            </a:extLst>
+          </p:cNvPr>
+          <p:cNvSpPr>
+            <a:spLocks noGrp="1"/>
+          </p:cNvSpPr>
+          <p:nvPr>
+            <p:ph type="ftr" sz="quarter" idx="11"/>
+          </p:nvPr>
+        </p:nvSpPr>
+        <p:spPr/>
+        <p:txBody>
+          <a:bodyPr/>
+          <a:lstStyle/>
+          <a:p>
+            <a:r>
+              <a:rPr lang="et-EE"/>
+              <a:t>Weekly</a:t>
+            </a:r>
+          </a:p>
+        </p:txBody>
+      </p:sp>
+      <p:sp>
+        <p:nvSpPr>
+          <p:cNvPr id="6" name="Slide Number Placeholder 5">
+            <a:extLst>
+              <a:ext uri="{FF2B5EF4-FFF2-40B4-BE49-F238E27FC236}">
+                <a16:creationId xmlns:a16="http://schemas.microsoft.com/office/drawing/2014/main" id="{718F28ED-94A0-4D65-83BA-30F264BA0EC6}"/>
+              </a:ext>
+            </a:extLst>
+          </p:cNvPr>
+          <p:cNvSpPr>
+            <a:spLocks noGrp="1"/>
+          </p:cNvSpPr>
+          <p:nvPr>
+            <p:ph type="sldNum" sz="quarter" idx="12"/>
+          </p:nvPr>
+        </p:nvSpPr>
+        <p:spPr/>
+        <p:txBody>
+          <a:bodyPr/>
+          <a:lstStyle/>
+          <a:p>
+            <a:fld id="{9F39E346-B1F3-4075-BD67-234EF0F10AC6}" type="slidenum">
+              <a:rPr lang="et-EE" smtClean="0"/>
+              <a:pPr/>
+              <a:t>7</a:t>
+            </a:fld>
+            <a:endParaRPr lang="et-EE" dirty="0"/>
+          </a:p>
+        </p:txBody>
+      </p:sp>
+      <p:pic>
+        <p:nvPicPr>
+          <p:cNvPr id="10" name="Content Placeholder 9">
+            <a:extLst>
+              <a:ext uri="{FF2B5EF4-FFF2-40B4-BE49-F238E27FC236}">
+                <a16:creationId xmlns:a16="http://schemas.microsoft.com/office/drawing/2014/main" id="{FF0A102D-6000-4B13-94B4-7D29835C5D8D}"/>
+              </a:ext>
+            </a:extLst>
+          </p:cNvPr>
+          <p:cNvPicPr>
+            <a:picLocks noGrp="1" noChangeAspect="1"/>
+          </p:cNvPicPr>
+          <p:nvPr>
+            <p:ph idx="1"/>
+          </p:nvPr>
+        </p:nvPicPr>
+        <p:blipFill>
+          <a:blip r:embed="rId2"/>
+          <a:srcRect/>
+          <a:stretch/>
+        </p:blipFill>
+        <p:spPr>
+          <a:xfrm>
+            <a:off x="-906200" y="789528"/>
+            <a:ext cx="7334850" cy="5975933"/>
+          </a:xfrm>
+        </p:spPr>
+      </p:pic>
+      <p:pic>
+        <p:nvPicPr>
+          <p:cNvPr id="13" name="Picture 12">
+            <a:extLst>
+              <a:ext uri="{FF2B5EF4-FFF2-40B4-BE49-F238E27FC236}">
+                <a16:creationId xmlns:a16="http://schemas.microsoft.com/office/drawing/2014/main" id="{2C245DE2-320C-480F-8FCE-43F0DFCD86FF}"/>
+              </a:ext>
+            </a:extLst>
+          </p:cNvPr>
+          <p:cNvPicPr>
+            <a:picLocks noChangeAspect="1"/>
+          </p:cNvPicPr>
+          <p:nvPr/>
+        </p:nvPicPr>
+        <p:blipFill>
+          <a:blip r:embed="rId3"/>
+          <a:srcRect/>
+          <a:stretch/>
+        </p:blipFill>
+        <p:spPr>
+          <a:xfrm>
+            <a:off x="6134061" y="1779305"/>
+            <a:ext cx="5712918" cy="3570574"/>
+          </a:xfrm>
+          <a:prstGeom prst="rect">
+            <a:avLst/>
+          </a:prstGeom>
+        </p:spPr>
+      </p:pic>
+    </p:spTree>
+    <p:extLst>
+      <p:ext uri="{BB962C8B-B14F-4D97-AF65-F5344CB8AC3E}">
+        <p14:creationId xmlns:p14="http://schemas.microsoft.com/office/powerpoint/2010/main" val="2623873885"/>
+      </p:ext>
+    </p:extLst>
+  </p:cSld>
+  <p:clrMapOvr>
+    <a:masterClrMapping/>
+  </p:clrMapOvr>
+</p:sld>
+</file>
+
+<file path=ppt/slides/slide8.xml><?xml version="1.0" encoding="utf-8"?>
+<p:sld xmlns:a="http://schemas.openxmlformats.org/drawingml/2006/main" xmlns:r="http://schemas.openxmlformats.org/officeDocument/2006/relationships" xmlns:p="http://schemas.openxmlformats.org/presentationml/2006/main">
+  <p:cSld>
+    <p:spTree>
+      <p:nvGrpSpPr>
+        <p:cNvPr id="1" name=""/>
+        <p:cNvGrpSpPr/>
+        <p:nvPr/>
+      </p:nvGrpSpPr>
+      <p:grpSpPr>
+        <a:xfrm>
+          <a:off x="0" y="0"/>
+          <a:ext cx="0" cy="0"/>
+          <a:chOff x="0" y="0"/>
+          <a:chExt cx="0" cy="0"/>
+        </a:xfrm>
+      </p:grpSpPr>
+      <p:sp>
+        <p:nvSpPr>
+          <p:cNvPr id="2" name="Title 1">
+            <a:extLst>
+              <a:ext uri="{FF2B5EF4-FFF2-40B4-BE49-F238E27FC236}">
+                <a16:creationId xmlns:a16="http://schemas.microsoft.com/office/drawing/2014/main" id="{6BF31FA5-6520-4CA9-9331-30A269AA64D0}"/>
+              </a:ext>
+            </a:extLst>
+          </p:cNvPr>
+          <p:cNvSpPr>
+            <a:spLocks noGrp="1"/>
+          </p:cNvSpPr>
+          <p:nvPr>
+            <p:ph type="title"/>
+          </p:nvPr>
+        </p:nvSpPr>
+        <p:spPr/>
+        <p:txBody>
+          <a:bodyPr>
+            <a:normAutofit fontScale="90000"/>
+          </a:bodyPr>
+          <a:lstStyle/>
+          <a:p>
+            <a:r>
+              <a:rPr lang="en-US" dirty="0"/>
+              <a:t>TDI1 Michelson X Combination with sidebands</a:t>
+            </a:r>
+            <a:endParaRPr lang="LID4096" dirty="0"/>
+          </a:p>
+        </p:txBody>
+      </p:sp>
+      <p:sp>
+        <p:nvSpPr>
+          <p:cNvPr id="4" name="Date Placeholder 3">
+            <a:extLst>
+              <a:ext uri="{FF2B5EF4-FFF2-40B4-BE49-F238E27FC236}">
+                <a16:creationId xmlns:a16="http://schemas.microsoft.com/office/drawing/2014/main" id="{07956381-EBAB-40C7-AF56-E1C175082244}"/>
+              </a:ext>
+            </a:extLst>
+          </p:cNvPr>
+          <p:cNvSpPr>
+            <a:spLocks noGrp="1"/>
+          </p:cNvSpPr>
+          <p:nvPr>
+            <p:ph type="dt" sz="half" idx="10"/>
+          </p:nvPr>
+        </p:nvSpPr>
+        <p:spPr/>
+        <p:txBody>
+          <a:bodyPr/>
+          <a:lstStyle/>
+          <a:p>
+            <a:fld id="{E1CF8E31-244F-4A6A-A7D5-704B96C48AAE}" type="datetime1">
+              <a:rPr lang="et-EE" smtClean="0"/>
+              <a:t>21.08.2026</a:t>
+            </a:fld>
+            <a:endParaRPr lang="et-EE" dirty="0"/>
+          </a:p>
+        </p:txBody>
+      </p:sp>
+      <p:sp>
+        <p:nvSpPr>
+          <p:cNvPr id="5" name="Footer Placeholder 4">
+            <a:extLst>
+              <a:ext uri="{FF2B5EF4-FFF2-40B4-BE49-F238E27FC236}">
+                <a16:creationId xmlns:a16="http://schemas.microsoft.com/office/drawing/2014/main" id="{33FC2B13-FDDF-49C1-87EB-E43ACEA24E33}"/>
+              </a:ext>
+            </a:extLst>
+          </p:cNvPr>
+          <p:cNvSpPr>
+            <a:spLocks noGrp="1"/>
+          </p:cNvSpPr>
+          <p:nvPr>
+            <p:ph type="ftr" sz="quarter" idx="11"/>
+          </p:nvPr>
+        </p:nvSpPr>
+        <p:spPr/>
+        <p:txBody>
+          <a:bodyPr/>
+          <a:lstStyle/>
+          <a:p>
+            <a:r>
+              <a:rPr lang="et-EE"/>
+              <a:t>Weekly</a:t>
+            </a:r>
+          </a:p>
+        </p:txBody>
+      </p:sp>
+      <p:sp>
+        <p:nvSpPr>
+          <p:cNvPr id="6" name="Slide Number Placeholder 5">
+            <a:extLst>
+              <a:ext uri="{FF2B5EF4-FFF2-40B4-BE49-F238E27FC236}">
+                <a16:creationId xmlns:a16="http://schemas.microsoft.com/office/drawing/2014/main" id="{718F28ED-94A0-4D65-83BA-30F264BA0EC6}"/>
+              </a:ext>
+            </a:extLst>
+          </p:cNvPr>
+          <p:cNvSpPr>
+            <a:spLocks noGrp="1"/>
+          </p:cNvSpPr>
+          <p:nvPr>
+            <p:ph type="sldNum" sz="quarter" idx="12"/>
+          </p:nvPr>
+        </p:nvSpPr>
+        <p:spPr/>
+        <p:txBody>
+          <a:bodyPr/>
+          <a:lstStyle/>
+          <a:p>
+            <a:fld id="{9F39E346-B1F3-4075-BD67-234EF0F10AC6}" type="slidenum">
+              <a:rPr lang="et-EE" smtClean="0"/>
+              <a:pPr/>
+              <a:t>8</a:t>
+            </a:fld>
+            <a:endParaRPr lang="et-EE" dirty="0"/>
+          </a:p>
+        </p:txBody>
+      </p:sp>
+      <p:pic>
+        <p:nvPicPr>
+          <p:cNvPr id="15" name="Content Placeholder 14">
+            <a:extLst>
+              <a:ext uri="{FF2B5EF4-FFF2-40B4-BE49-F238E27FC236}">
+                <a16:creationId xmlns:a16="http://schemas.microsoft.com/office/drawing/2014/main" id="{75A9C25C-0844-4EB9-800D-471F8841EF44}"/>
+              </a:ext>
+            </a:extLst>
+          </p:cNvPr>
+          <p:cNvPicPr>
+            <a:picLocks noGrp="1" noChangeAspect="1"/>
+          </p:cNvPicPr>
+          <p:nvPr>
+            <p:ph idx="1"/>
+          </p:nvPr>
+        </p:nvPicPr>
+        <p:blipFill>
+          <a:blip r:embed="rId2"/>
+          <a:stretch>
+            <a:fillRect/>
+          </a:stretch>
+        </p:blipFill>
+        <p:spPr>
+          <a:xfrm>
+            <a:off x="3947904" y="1603004"/>
+            <a:ext cx="6985000" cy="4365625"/>
+          </a:xfrm>
+        </p:spPr>
+      </p:pic>
+    </p:spTree>
+    <p:extLst>
+      <p:ext uri="{BB962C8B-B14F-4D97-AF65-F5344CB8AC3E}">
+        <p14:creationId xmlns:p14="http://schemas.microsoft.com/office/powerpoint/2010/main" val="2492546516"/>
       </p:ext>
     </p:extLst>
   </p:cSld>

--- a/updates.pptx
+++ b/updates.pptx
@@ -222,7 +222,7 @@
           <a:p>
             <a:fld id="{AB81B2D2-06A2-4596-9391-656CA05E965F}" type="datetimeFigureOut">
               <a:rPr lang="et-EE" smtClean="0"/>
-              <a:t>21.08.2026</a:t>
+              <a:t>21.08.26</a:t>
             </a:fld>
             <a:endParaRPr lang="et-EE"/>
           </a:p>
@@ -636,7 +636,7 @@
           <a:p>
             <a:fld id="{0E412FDE-1CFE-48F6-820F-9C443C301228}" type="datetime1">
               <a:rPr lang="et-EE" smtClean="0"/>
-              <a:t>21.08.2026</a:t>
+              <a:t>21.08.26</a:t>
             </a:fld>
             <a:endParaRPr lang="et-EE" dirty="0"/>
           </a:p>
@@ -820,7 +820,7 @@
           <a:p>
             <a:fld id="{B64C0CFC-214E-42F4-8B82-CC6D451BD70F}" type="datetime1">
               <a:rPr lang="et-EE" smtClean="0"/>
-              <a:t>21.08.2026</a:t>
+              <a:t>21.08.26</a:t>
             </a:fld>
             <a:endParaRPr lang="et-EE"/>
           </a:p>
@@ -1003,7 +1003,7 @@
           <a:p>
             <a:fld id="{5AB58BF1-41C1-47B8-ACAE-F9884B88C63A}" type="datetime1">
               <a:rPr lang="et-EE" smtClean="0"/>
-              <a:t>21.08.2026</a:t>
+              <a:t>21.08.26</a:t>
             </a:fld>
             <a:endParaRPr lang="et-EE"/>
           </a:p>
@@ -1265,7 +1265,7 @@
           <a:p>
             <a:fld id="{E1CF8E31-244F-4A6A-A7D5-704B96C48AAE}" type="datetime1">
               <a:rPr lang="et-EE" smtClean="0"/>
-              <a:t>21.08.2026</a:t>
+              <a:t>21.08.26</a:t>
             </a:fld>
             <a:endParaRPr lang="et-EE" dirty="0"/>
           </a:p>
@@ -1977,7 +1977,7 @@
           <a:p>
             <a:fld id="{CF92296B-3A94-4787-AA7D-8DC0AEE88FD4}" type="datetime1">
               <a:rPr lang="et-EE" smtClean="0"/>
-              <a:t>21.08.2026</a:t>
+              <a:t>21.08.26</a:t>
             </a:fld>
             <a:endParaRPr lang="et-EE"/>
           </a:p>
@@ -2347,7 +2347,7 @@
           <a:p>
             <a:fld id="{185751C1-87AF-4EAC-9696-BB82432B7753}" type="datetime1">
               <a:rPr lang="et-EE" smtClean="0"/>
-              <a:t>21.08.2026</a:t>
+              <a:t>21.08.26</a:t>
             </a:fld>
             <a:endParaRPr lang="et-EE"/>
           </a:p>
@@ -2445,7 +2445,7 @@
           <a:p>
             <a:fld id="{E493E3B0-4572-4FE0-8E55-6746BFAADA96}" type="datetime1">
               <a:rPr lang="et-EE" smtClean="0"/>
-              <a:t>21.08.2026</a:t>
+              <a:t>21.08.26</a:t>
             </a:fld>
             <a:endParaRPr lang="et-EE"/>
           </a:p>
@@ -2590,7 +2590,7 @@
           <a:p>
             <a:fld id="{EE4C4D14-98D7-455C-9D0D-2863E0C0AA0D}" type="datetime1">
               <a:rPr lang="et-EE" smtClean="0"/>
-              <a:t>21.08.2026</a:t>
+              <a:t>21.08.26</a:t>
             </a:fld>
             <a:endParaRPr lang="et-EE"/>
           </a:p>
@@ -2870,7 +2870,7 @@
           <a:p>
             <a:fld id="{94997DBE-8AE5-4A6F-9E25-F62C693D8ED5}" type="datetime1">
               <a:rPr lang="et-EE" smtClean="0"/>
-              <a:t>21.08.2026</a:t>
+              <a:t>21.08.26</a:t>
             </a:fld>
             <a:endParaRPr lang="et-EE"/>
           </a:p>
@@ -3130,7 +3130,7 @@
           <a:p>
             <a:fld id="{DA3B51F9-97BE-4EFF-9934-D6DB8E40FF5E}" type="datetime1">
               <a:rPr lang="et-EE" smtClean="0"/>
-              <a:t>21.08.2026</a:t>
+              <a:t>21.08.26</a:t>
             </a:fld>
             <a:endParaRPr lang="et-EE"/>
           </a:p>
@@ -3347,7 +3347,7 @@
           <a:p>
             <a:fld id="{E7C7EEDD-722C-4F14-9239-A37AD281B51F}" type="datetime1">
               <a:rPr lang="et-EE" smtClean="0"/>
-              <a:t>21.08.2026</a:t>
+              <a:t>21.08.26</a:t>
             </a:fld>
             <a:endParaRPr lang="et-EE" dirty="0"/>
           </a:p>
@@ -4086,7 +4086,7 @@
           <a:p>
             <a:fld id="{E1CF8E31-244F-4A6A-A7D5-704B96C48AAE}" type="datetime1">
               <a:rPr lang="et-EE" smtClean="0"/>
-              <a:t>21.08.2026</a:t>
+              <a:t>21.08.26</a:t>
             </a:fld>
             <a:endParaRPr lang="et-EE" dirty="0"/>
           </a:p>
@@ -4453,7 +4453,7 @@
           <a:p>
             <a:fld id="{E1CF8E31-244F-4A6A-A7D5-704B96C48AAE}" type="datetime1">
               <a:rPr lang="et-EE" smtClean="0"/>
-              <a:t>21.08.2026</a:t>
+              <a:t>21.08.26</a:t>
             </a:fld>
             <a:endParaRPr lang="et-EE" dirty="0"/>
           </a:p>
@@ -4815,7 +4815,7 @@
           <a:p>
             <a:fld id="{E1CF8E31-244F-4A6A-A7D5-704B96C48AAE}" type="datetime1">
               <a:rPr lang="et-EE" smtClean="0"/>
-              <a:t>21.08.2026</a:t>
+              <a:t>21.08.26</a:t>
             </a:fld>
             <a:endParaRPr lang="et-EE" dirty="0"/>
           </a:p>
@@ -5052,7 +5052,7 @@
           <a:p>
             <a:fld id="{E1CF8E31-244F-4A6A-A7D5-704B96C48AAE}" type="datetime1">
               <a:rPr lang="et-EE" smtClean="0"/>
-              <a:t>21.08.2026</a:t>
+              <a:t>21.08.26</a:t>
             </a:fld>
             <a:endParaRPr lang="et-EE" dirty="0"/>
           </a:p>
@@ -5374,7 +5374,7 @@
           <a:p>
             <a:fld id="{E1CF8E31-244F-4A6A-A7D5-704B96C48AAE}" type="datetime1">
               <a:rPr lang="et-EE" smtClean="0"/>
-              <a:t>21.08.2026</a:t>
+              <a:t>21.08.26</a:t>
             </a:fld>
             <a:endParaRPr lang="et-EE" dirty="0"/>
           </a:p>
@@ -5551,7 +5551,7 @@
           <a:p>
             <a:fld id="{E1CF8E31-244F-4A6A-A7D5-704B96C48AAE}" type="datetime1">
               <a:rPr lang="et-EE" smtClean="0"/>
-              <a:t>21.08.2026</a:t>
+              <a:t>21.08.26</a:t>
             </a:fld>
             <a:endParaRPr lang="et-EE" dirty="0"/>
           </a:p>
@@ -5756,7 +5756,7 @@
           <a:p>
             <a:fld id="{E1CF8E31-244F-4A6A-A7D5-704B96C48AAE}" type="datetime1">
               <a:rPr lang="et-EE" smtClean="0"/>
-              <a:t>21.08.2026</a:t>
+              <a:t>21.08.26</a:t>
             </a:fld>
             <a:endParaRPr lang="et-EE" dirty="0"/>
           </a:p>

--- a/updates.pptx
+++ b/updates.pptx
@@ -222,7 +222,7 @@
           <a:p>
             <a:fld id="{AB81B2D2-06A2-4596-9391-656CA05E965F}" type="datetimeFigureOut">
               <a:rPr lang="et-EE" smtClean="0"/>
-              <a:t>21.08.26</a:t>
+              <a:t>26.08.2026</a:t>
             </a:fld>
             <a:endParaRPr lang="et-EE"/>
           </a:p>
@@ -636,7 +636,7 @@
           <a:p>
             <a:fld id="{0E412FDE-1CFE-48F6-820F-9C443C301228}" type="datetime1">
               <a:rPr lang="et-EE" smtClean="0"/>
-              <a:t>21.08.26</a:t>
+              <a:t>26.08.2026</a:t>
             </a:fld>
             <a:endParaRPr lang="et-EE" dirty="0"/>
           </a:p>
@@ -820,7 +820,7 @@
           <a:p>
             <a:fld id="{B64C0CFC-214E-42F4-8B82-CC6D451BD70F}" type="datetime1">
               <a:rPr lang="et-EE" smtClean="0"/>
-              <a:t>21.08.26</a:t>
+              <a:t>26.08.2026</a:t>
             </a:fld>
             <a:endParaRPr lang="et-EE"/>
           </a:p>
@@ -1003,7 +1003,7 @@
           <a:p>
             <a:fld id="{5AB58BF1-41C1-47B8-ACAE-F9884B88C63A}" type="datetime1">
               <a:rPr lang="et-EE" smtClean="0"/>
-              <a:t>21.08.26</a:t>
+              <a:t>26.08.2026</a:t>
             </a:fld>
             <a:endParaRPr lang="et-EE"/>
           </a:p>
@@ -1265,7 +1265,7 @@
           <a:p>
             <a:fld id="{E1CF8E31-244F-4A6A-A7D5-704B96C48AAE}" type="datetime1">
               <a:rPr lang="et-EE" smtClean="0"/>
-              <a:t>21.08.26</a:t>
+              <a:t>26.08.2026</a:t>
             </a:fld>
             <a:endParaRPr lang="et-EE" dirty="0"/>
           </a:p>
@@ -1977,7 +1977,7 @@
           <a:p>
             <a:fld id="{CF92296B-3A94-4787-AA7D-8DC0AEE88FD4}" type="datetime1">
               <a:rPr lang="et-EE" smtClean="0"/>
-              <a:t>21.08.26</a:t>
+              <a:t>26.08.2026</a:t>
             </a:fld>
             <a:endParaRPr lang="et-EE"/>
           </a:p>
@@ -2347,7 +2347,7 @@
           <a:p>
             <a:fld id="{185751C1-87AF-4EAC-9696-BB82432B7753}" type="datetime1">
               <a:rPr lang="et-EE" smtClean="0"/>
-              <a:t>21.08.26</a:t>
+              <a:t>26.08.2026</a:t>
             </a:fld>
             <a:endParaRPr lang="et-EE"/>
           </a:p>
@@ -2445,7 +2445,7 @@
           <a:p>
             <a:fld id="{E493E3B0-4572-4FE0-8E55-6746BFAADA96}" type="datetime1">
               <a:rPr lang="et-EE" smtClean="0"/>
-              <a:t>21.08.26</a:t>
+              <a:t>26.08.2026</a:t>
             </a:fld>
             <a:endParaRPr lang="et-EE"/>
           </a:p>
@@ -2590,7 +2590,7 @@
           <a:p>
             <a:fld id="{EE4C4D14-98D7-455C-9D0D-2863E0C0AA0D}" type="datetime1">
               <a:rPr lang="et-EE" smtClean="0"/>
-              <a:t>21.08.26</a:t>
+              <a:t>26.08.2026</a:t>
             </a:fld>
             <a:endParaRPr lang="et-EE"/>
           </a:p>
@@ -2870,7 +2870,7 @@
           <a:p>
             <a:fld id="{94997DBE-8AE5-4A6F-9E25-F62C693D8ED5}" type="datetime1">
               <a:rPr lang="et-EE" smtClean="0"/>
-              <a:t>21.08.26</a:t>
+              <a:t>26.08.2026</a:t>
             </a:fld>
             <a:endParaRPr lang="et-EE"/>
           </a:p>
@@ -3130,7 +3130,7 @@
           <a:p>
             <a:fld id="{DA3B51F9-97BE-4EFF-9934-D6DB8E40FF5E}" type="datetime1">
               <a:rPr lang="et-EE" smtClean="0"/>
-              <a:t>21.08.26</a:t>
+              <a:t>26.08.2026</a:t>
             </a:fld>
             <a:endParaRPr lang="et-EE"/>
           </a:p>
@@ -3347,7 +3347,7 @@
           <a:p>
             <a:fld id="{E7C7EEDD-722C-4F14-9239-A37AD281B51F}" type="datetime1">
               <a:rPr lang="et-EE" smtClean="0"/>
-              <a:t>21.08.26</a:t>
+              <a:t>26.08.2026</a:t>
             </a:fld>
             <a:endParaRPr lang="et-EE" dirty="0"/>
           </a:p>
@@ -4086,7 +4086,7 @@
           <a:p>
             <a:fld id="{E1CF8E31-244F-4A6A-A7D5-704B96C48AAE}" type="datetime1">
               <a:rPr lang="et-EE" smtClean="0"/>
-              <a:t>21.08.26</a:t>
+              <a:t>26.08.2026</a:t>
             </a:fld>
             <a:endParaRPr lang="et-EE" dirty="0"/>
           </a:p>
@@ -4283,7 +4283,7 @@
         <p:spPr>
           <a:xfrm>
             <a:off x="9413216" y="6015692"/>
-            <a:ext cx="2580664" cy="523220"/>
+            <a:ext cx="2580664" cy="738664"/>
           </a:xfrm>
           <a:prstGeom prst="rect">
             <a:avLst/>
@@ -4305,7 +4305,27 @@
                 <a:latin typeface="Arial" panose="020B0604020202020204" pitchFamily="34" charset="0"/>
                 <a:cs typeface="Arial" panose="020B0604020202020204" pitchFamily="34" charset="0"/>
               </a:rPr>
-              <a:t>Likely lobing from delay errors</a:t>
+              <a:t>Likely </a:t>
+            </a:r>
+            <a:r>
+              <a:rPr lang="en-US" sz="1400" dirty="0" err="1">
+                <a:solidFill>
+                  <a:srgbClr val="667982"/>
+                </a:solidFill>
+                <a:latin typeface="Arial" panose="020B0604020202020204" pitchFamily="34" charset="0"/>
+                <a:cs typeface="Arial" panose="020B0604020202020204" pitchFamily="34" charset="0"/>
+              </a:rPr>
+              <a:t>lobeing</a:t>
+            </a:r>
+            <a:r>
+              <a:rPr lang="en-US" sz="1400" dirty="0">
+                <a:solidFill>
+                  <a:srgbClr val="667982"/>
+                </a:solidFill>
+                <a:latin typeface="Arial" panose="020B0604020202020204" pitchFamily="34" charset="0"/>
+                <a:cs typeface="Arial" panose="020B0604020202020204" pitchFamily="34" charset="0"/>
+              </a:rPr>
+              <a:t> from delay errors</a:t>
             </a:r>
           </a:p>
           <a:p>
@@ -4453,7 +4473,7 @@
           <a:p>
             <a:fld id="{E1CF8E31-244F-4A6A-A7D5-704B96C48AAE}" type="datetime1">
               <a:rPr lang="et-EE" smtClean="0"/>
-              <a:t>21.08.26</a:t>
+              <a:t>26.08.2026</a:t>
             </a:fld>
             <a:endParaRPr lang="et-EE" dirty="0"/>
           </a:p>
@@ -4815,7 +4835,7 @@
           <a:p>
             <a:fld id="{E1CF8E31-244F-4A6A-A7D5-704B96C48AAE}" type="datetime1">
               <a:rPr lang="et-EE" smtClean="0"/>
-              <a:t>21.08.26</a:t>
+              <a:t>26.08.2026</a:t>
             </a:fld>
             <a:endParaRPr lang="et-EE" dirty="0"/>
           </a:p>
@@ -5052,7 +5072,7 @@
           <a:p>
             <a:fld id="{E1CF8E31-244F-4A6A-A7D5-704B96C48AAE}" type="datetime1">
               <a:rPr lang="et-EE" smtClean="0"/>
-              <a:t>21.08.26</a:t>
+              <a:t>26.08.2026</a:t>
             </a:fld>
             <a:endParaRPr lang="et-EE" dirty="0"/>
           </a:p>
@@ -5374,7 +5394,7 @@
           <a:p>
             <a:fld id="{E1CF8E31-244F-4A6A-A7D5-704B96C48AAE}" type="datetime1">
               <a:rPr lang="et-EE" smtClean="0"/>
-              <a:t>21.08.26</a:t>
+              <a:t>26.08.2026</a:t>
             </a:fld>
             <a:endParaRPr lang="et-EE" dirty="0"/>
           </a:p>
@@ -5551,7 +5571,7 @@
           <a:p>
             <a:fld id="{E1CF8E31-244F-4A6A-A7D5-704B96C48AAE}" type="datetime1">
               <a:rPr lang="et-EE" smtClean="0"/>
-              <a:t>21.08.26</a:t>
+              <a:t>26.08.2026</a:t>
             </a:fld>
             <a:endParaRPr lang="et-EE" dirty="0"/>
           </a:p>
@@ -5756,7 +5776,7 @@
           <a:p>
             <a:fld id="{E1CF8E31-244F-4A6A-A7D5-704B96C48AAE}" type="datetime1">
               <a:rPr lang="et-EE" smtClean="0"/>
-              <a:t>21.08.26</a:t>
+              <a:t>26.08.2026</a:t>
             </a:fld>
             <a:endParaRPr lang="et-EE" dirty="0"/>
           </a:p>
